--- a/01 Elementi Razvoja Softvera/02 Prezentacije/PPTX/08_Guardrails_evaluacije_i_QA.pptx
+++ b/01 Elementi Razvoja Softvera/02 Prezentacije/PPTX/08_Guardrails_evaluacije_i_QA.pptx
@@ -5988,7 +5988,7 @@
                 <a:ea typeface="Aptos Display"/>
                 <a:cs typeface="Aptos Display"/>
               </a:rPr>
-              <a:t>.claude/settings.json као адаптер</a:t>
+              <a:t>.kova/hooks.json и guardrail поставка</a:t>
             </a:r>
           </a:p>
         </p:txBody>
@@ -6044,7 +6044,7 @@
                 <a:ea typeface="Aptos"/>
                 <a:cs typeface="Aptos"/>
               </a:rPr>
-              <a:t>Hook позива guardrail пројекат пре ризичне операције.</a:t>
+              <a:t>Hook посматра позив алата, а guardrail пројекат доноси завршну одлуку.</a:t>
             </a:r>
           </a:p>
         </p:txBody>
@@ -6429,13 +6429,13 @@
             <a:r>
               <a:rPr sz="1032">
                 <a:solidFill>
-                  <a:srgbClr val="5C6574"/>
-                </a:solidFill>
-                <a:latin typeface="Consolas"/>
-                <a:ea typeface="Consolas"/>
-                <a:cs typeface="Consolas"/>
-              </a:rPr>
-              <a:t>{</a:t>
+                  <a:srgbClr val="55845A"/>
+                </a:solidFill>
+                <a:latin typeface="Consolas"/>
+                <a:ea typeface="Consolas"/>
+                <a:cs typeface="Consolas"/>
+              </a:rPr>
+              <a:t>// .kova/hooks.json</a:t>
             </a:r>
           </a:p>
           <a:p xmlns:a="http://schemas.openxmlformats.org/drawingml/2006/main">
@@ -6465,50 +6465,6 @@
             <a:r>
               <a:rPr sz="1032">
                 <a:solidFill>
-                  <a:srgbClr val="262B36"/>
-                </a:solidFill>
-                <a:latin typeface="Consolas"/>
-                <a:ea typeface="Consolas"/>
-                <a:cs typeface="Consolas"/>
-              </a:rPr>
-              <a:t>  </a:t>
-            </a:r>
-            <a:r>
-              <a:rPr sz="1032">
-                <a:solidFill>
-                  <a:srgbClr val="A95921"/>
-                </a:solidFill>
-                <a:latin typeface="Consolas"/>
-                <a:ea typeface="Consolas"/>
-                <a:cs typeface="Consolas"/>
-              </a:rPr>
-              <a:t>"hooks"</a:t>
-            </a:r>
-            <a:r>
-              <a:rPr sz="1032">
-                <a:solidFill>
-                  <a:srgbClr val="5C6574"/>
-                </a:solidFill>
-                <a:latin typeface="Consolas"/>
-                <a:ea typeface="Consolas"/>
-                <a:cs typeface="Consolas"/>
-              </a:rPr>
-              <a:t>:</a:t>
-            </a:r>
-            <a:r>
-              <a:rPr sz="1032">
-                <a:solidFill>
-                  <a:srgbClr val="262B36"/>
-                </a:solidFill>
-                <a:latin typeface="Consolas"/>
-                <a:ea typeface="Consolas"/>
-                <a:cs typeface="Consolas"/>
-              </a:rPr>
-              <a:t> </a:t>
-            </a:r>
-            <a:r>
-              <a:rPr sz="1032">
-                <a:solidFill>
                   <a:srgbClr val="5C6574"/>
                 </a:solidFill>
                 <a:latin typeface="Consolas"/>
@@ -6551,7 +6507,7 @@
                 <a:ea typeface="Consolas"/>
                 <a:cs typeface="Consolas"/>
               </a:rPr>
-              <a:t>    </a:t>
+              <a:t>  </a:t>
             </a:r>
             <a:r>
               <a:rPr sz="1032">
@@ -6562,7 +6518,7 @@
                 <a:ea typeface="Consolas"/>
                 <a:cs typeface="Consolas"/>
               </a:rPr>
-              <a:t>"PreToolUse"</a:t>
+              <a:t>"BeforeToolExecution"</a:t>
             </a:r>
             <a:r>
               <a:rPr sz="1032">
@@ -6631,7 +6587,7 @@
                 <a:ea typeface="Consolas"/>
                 <a:cs typeface="Consolas"/>
               </a:rPr>
-              <a:t>      </a:t>
+              <a:t>    </a:t>
             </a:r>
             <a:r>
               <a:rPr sz="1032">
@@ -6678,7 +6634,7 @@
                 <a:ea typeface="Consolas"/>
                 <a:cs typeface="Consolas"/>
               </a:rPr>
-              <a:t>        </a:t>
+              <a:t>      </a:t>
             </a:r>
             <a:r>
               <a:rPr sz="1032">
@@ -6689,7 +6645,7 @@
                 <a:ea typeface="Consolas"/>
                 <a:cs typeface="Consolas"/>
               </a:rPr>
-              <a:t>"matcher"</a:t>
+              <a:t>"id"</a:t>
             </a:r>
             <a:r>
               <a:rPr sz="1032">
@@ -6722,7 +6678,7 @@
                 <a:ea typeface="Consolas"/>
                 <a:cs typeface="Consolas"/>
               </a:rPr>
-              <a:t>"Bash|Read|Edit|Write"</a:t>
+              <a:t>"ers-audit-before"</a:t>
             </a:r>
             <a:r>
               <a:rPr sz="1032">
@@ -6769,7 +6725,7 @@
                 <a:ea typeface="Consolas"/>
                 <a:cs typeface="Consolas"/>
               </a:rPr>
-              <a:t>        </a:t>
+              <a:t>      </a:t>
             </a:r>
             <a:r>
               <a:rPr sz="1032">
@@ -6780,7 +6736,7 @@
                 <a:ea typeface="Consolas"/>
                 <a:cs typeface="Consolas"/>
               </a:rPr>
-              <a:t>"hooks"</a:t>
+              <a:t>"command"</a:t>
             </a:r>
             <a:r>
               <a:rPr sz="1032">
@@ -6807,13 +6763,24 @@
             <a:r>
               <a:rPr sz="1032">
                 <a:solidFill>
+                  <a:srgbClr val="A95921"/>
+                </a:solidFill>
+                <a:latin typeface="Consolas"/>
+                <a:ea typeface="Consolas"/>
+                <a:cs typeface="Consolas"/>
+              </a:rPr>
+              <a:t>"node"</a:t>
+            </a:r>
+            <a:r>
+              <a:rPr sz="1032">
+                <a:solidFill>
                   <a:srgbClr val="5C6574"/>
                 </a:solidFill>
                 <a:latin typeface="Consolas"/>
                 <a:ea typeface="Consolas"/>
                 <a:cs typeface="Consolas"/>
               </a:rPr>
-              <a:t>[{</a:t>
+              <a:t>,</a:t>
             </a:r>
           </a:p>
           <a:p xmlns:a="http://schemas.openxmlformats.org/drawingml/2006/main">
@@ -6849,7 +6816,7 @@
                 <a:ea typeface="Consolas"/>
                 <a:cs typeface="Consolas"/>
               </a:rPr>
-              <a:t>          </a:t>
+              <a:t>      </a:t>
             </a:r>
             <a:r>
               <a:rPr sz="1032">
@@ -6860,7 +6827,7 @@
                 <a:ea typeface="Consolas"/>
                 <a:cs typeface="Consolas"/>
               </a:rPr>
-              <a:t>"type"</a:t>
+              <a:t>"args"</a:t>
             </a:r>
             <a:r>
               <a:rPr sz="1032">
@@ -6887,13 +6854,24 @@
             <a:r>
               <a:rPr sz="1032">
                 <a:solidFill>
+                  <a:srgbClr val="5C6574"/>
+                </a:solidFill>
+                <a:latin typeface="Consolas"/>
+                <a:ea typeface="Consolas"/>
+                <a:cs typeface="Consolas"/>
+              </a:rPr>
+              <a:t>[</a:t>
+            </a:r>
+            <a:r>
+              <a:rPr sz="1032">
+                <a:solidFill>
                   <a:srgbClr val="A95921"/>
                 </a:solidFill>
                 <a:latin typeface="Consolas"/>
                 <a:ea typeface="Consolas"/>
                 <a:cs typeface="Consolas"/>
               </a:rPr>
-              <a:t>"command"</a:t>
+              <a:t>"scripts/kova-audit.mjs"</a:t>
             </a:r>
             <a:r>
               <a:rPr sz="1032">
@@ -6904,7 +6882,7 @@
                 <a:ea typeface="Consolas"/>
                 <a:cs typeface="Consolas"/>
               </a:rPr>
-              <a:t>,</a:t>
+              <a:t>],</a:t>
             </a:r>
           </a:p>
           <a:p xmlns:a="http://schemas.openxmlformats.org/drawingml/2006/main">
@@ -6940,7 +6918,7 @@
                 <a:ea typeface="Consolas"/>
                 <a:cs typeface="Consolas"/>
               </a:rPr>
-              <a:t>          </a:t>
+              <a:t>      </a:t>
             </a:r>
             <a:r>
               <a:rPr sz="1032">
@@ -6951,7 +6929,7 @@
                 <a:ea typeface="Consolas"/>
                 <a:cs typeface="Consolas"/>
               </a:rPr>
-              <a:t>"command"</a:t>
+              <a:t>"timeoutMs"</a:t>
             </a:r>
             <a:r>
               <a:rPr sz="1032">
@@ -6978,46 +6956,13 @@
             <a:r>
               <a:rPr sz="1032">
                 <a:solidFill>
-                  <a:srgbClr val="A95921"/>
-                </a:solidFill>
-                <a:latin typeface="Consolas"/>
-                <a:ea typeface="Consolas"/>
-                <a:cs typeface="Consolas"/>
-              </a:rPr>
-              <a:t>"</a:t>
-            </a:r>
-            <a:r>
-              <a:rPr sz="1032">
-                <a:solidFill>
-                  <a:srgbClr val="262B36"/>
-                </a:solidFill>
-                <a:latin typeface="Consolas"/>
-                <a:ea typeface="Consolas"/>
-                <a:cs typeface="Consolas"/>
-              </a:rPr>
-              <a:t>dotnet run </a:t>
-            </a:r>
-            <a:r>
-              <a:rPr sz="1032">
-                <a:solidFill>
-                  <a:srgbClr val="5C6574"/>
-                </a:solidFill>
-                <a:latin typeface="Consolas"/>
-                <a:ea typeface="Consolas"/>
-                <a:cs typeface="Consolas"/>
-              </a:rPr>
-              <a:t>--</a:t>
-            </a:r>
-            <a:r>
-              <a:rPr sz="1032">
-                <a:solidFill>
-                  <a:srgbClr val="262B36"/>
-                </a:solidFill>
-                <a:latin typeface="Consolas"/>
-                <a:ea typeface="Consolas"/>
-                <a:cs typeface="Consolas"/>
-              </a:rPr>
-              <a:t>project</a:t>
+                  <a:srgbClr val="197373"/>
+                </a:solidFill>
+                <a:latin typeface="Consolas"/>
+                <a:ea typeface="Consolas"/>
+                <a:cs typeface="Consolas"/>
+              </a:rPr>
+              <a:t>5000</a:t>
             </a:r>
           </a:p>
           <a:p xmlns:a="http://schemas.openxmlformats.org/drawingml/2006/main">
@@ -7053,7 +6998,7 @@
                 <a:ea typeface="Consolas"/>
                 <a:cs typeface="Consolas"/>
               </a:rPr>
-              <a:t>              src</a:t>
+              <a:t>    </a:t>
             </a:r>
             <a:r>
               <a:rPr sz="1032">
@@ -7064,62 +7009,7 @@
                 <a:ea typeface="Consolas"/>
                 <a:cs typeface="Consolas"/>
               </a:rPr>
-              <a:t>/</a:t>
-            </a:r>
-            <a:r>
-              <a:rPr sz="1032" b="1">
-                <a:solidFill>
-                  <a:srgbClr val="7442C8"/>
-                </a:solidFill>
-                <a:latin typeface="Consolas"/>
-                <a:ea typeface="Consolas"/>
-                <a:cs typeface="Consolas"/>
-              </a:rPr>
-              <a:t>EquipmentReservation</a:t>
-            </a:r>
-            <a:r>
-              <a:rPr sz="1032">
-                <a:solidFill>
-                  <a:srgbClr val="5C6574"/>
-                </a:solidFill>
-                <a:latin typeface="Consolas"/>
-                <a:ea typeface="Consolas"/>
-                <a:cs typeface="Consolas"/>
-              </a:rPr>
-              <a:t>.</a:t>
-            </a:r>
-            <a:r>
-              <a:rPr sz="1032" b="1">
-                <a:solidFill>
-                  <a:srgbClr val="7442C8"/>
-                </a:solidFill>
-                <a:latin typeface="Consolas"/>
-                <a:ea typeface="Consolas"/>
-                <a:cs typeface="Consolas"/>
-              </a:rPr>
-              <a:t>Guardrails</a:t>
-            </a:r>
-            <a:r>
-              <a:rPr sz="1032">
-                <a:solidFill>
-                  <a:srgbClr val="5C6574"/>
-                </a:solidFill>
-                <a:latin typeface="Consolas"/>
-                <a:ea typeface="Consolas"/>
-                <a:cs typeface="Consolas"/>
-              </a:rPr>
-              <a:t>/</a:t>
-            </a:r>
-            <a:r>
-              <a:rPr sz="1032" b="1">
-                <a:solidFill>
-                  <a:srgbClr val="7442C8"/>
-                </a:solidFill>
-                <a:latin typeface="Consolas"/>
-                <a:ea typeface="Consolas"/>
-                <a:cs typeface="Consolas"/>
-              </a:rPr>
-              <a:t>Equipment</a:t>
+              <a:t>}</a:t>
             </a:r>
           </a:p>
           <a:p xmlns:a="http://schemas.openxmlformats.org/drawingml/2006/main">
@@ -7155,18 +7045,7 @@
                 <a:ea typeface="Consolas"/>
                 <a:cs typeface="Consolas"/>
               </a:rPr>
-              <a:t>                  </a:t>
-            </a:r>
-            <a:r>
-              <a:rPr sz="1032" b="1">
-                <a:solidFill>
-                  <a:srgbClr val="7442C8"/>
-                </a:solidFill>
-                <a:latin typeface="Consolas"/>
-                <a:ea typeface="Consolas"/>
-                <a:cs typeface="Consolas"/>
-              </a:rPr>
-              <a:t>Reservation</a:t>
+              <a:t>  </a:t>
             </a:r>
             <a:r>
               <a:rPr sz="1032">
@@ -7177,51 +7056,7 @@
                 <a:ea typeface="Consolas"/>
                 <a:cs typeface="Consolas"/>
               </a:rPr>
-              <a:t>.</a:t>
-            </a:r>
-            <a:r>
-              <a:rPr sz="1032" b="1">
-                <a:solidFill>
-                  <a:srgbClr val="7442C8"/>
-                </a:solidFill>
-                <a:latin typeface="Consolas"/>
-                <a:ea typeface="Consolas"/>
-                <a:cs typeface="Consolas"/>
-              </a:rPr>
-              <a:t>Guardrails</a:t>
-            </a:r>
-            <a:r>
-              <a:rPr sz="1032">
-                <a:solidFill>
-                  <a:srgbClr val="5C6574"/>
-                </a:solidFill>
-                <a:latin typeface="Consolas"/>
-                <a:ea typeface="Consolas"/>
-                <a:cs typeface="Consolas"/>
-              </a:rPr>
-              <a:t>.</a:t>
-            </a:r>
-            <a:r>
-              <a:rPr sz="1032">
-                <a:solidFill>
-                  <a:srgbClr val="262B36"/>
-                </a:solidFill>
-                <a:latin typeface="Consolas"/>
-                <a:ea typeface="Consolas"/>
-                <a:cs typeface="Consolas"/>
-              </a:rPr>
-              <a:t>csproj</a:t>
-            </a:r>
-            <a:r>
-              <a:rPr sz="1032">
-                <a:solidFill>
-                  <a:srgbClr val="A95921"/>
-                </a:solidFill>
-                <a:latin typeface="Consolas"/>
-                <a:ea typeface="Consolas"/>
-                <a:cs typeface="Consolas"/>
-              </a:rPr>
-              <a:t>"</a:t>
+              <a:t>]</a:t>
             </a:r>
           </a:p>
           <a:p xmlns:a="http://schemas.openxmlformats.org/drawingml/2006/main">
@@ -7251,24 +7086,13 @@
             <a:r>
               <a:rPr sz="1032">
                 <a:solidFill>
-                  <a:srgbClr val="262B36"/>
-                </a:solidFill>
-                <a:latin typeface="Consolas"/>
-                <a:ea typeface="Consolas"/>
-                <a:cs typeface="Consolas"/>
-              </a:rPr>
-              <a:t>        </a:t>
-            </a:r>
-            <a:r>
-              <a:rPr sz="1032">
-                <a:solidFill>
                   <a:srgbClr val="5C6574"/>
                 </a:solidFill>
                 <a:latin typeface="Consolas"/>
                 <a:ea typeface="Consolas"/>
                 <a:cs typeface="Consolas"/>
               </a:rPr>
-              <a:t>}]</a:t>
+              <a:t>}</a:t>
             </a:r>
           </a:p>
           <a:p xmlns:a="http://schemas.openxmlformats.org/drawingml/2006/main">
@@ -7295,28 +7119,6 @@
               </a:rPr>
               <a:t>12  </a:t>
             </a:r>
-            <a:r>
-              <a:rPr sz="1032">
-                <a:solidFill>
-                  <a:srgbClr val="262B36"/>
-                </a:solidFill>
-                <a:latin typeface="Consolas"/>
-                <a:ea typeface="Consolas"/>
-                <a:cs typeface="Consolas"/>
-              </a:rPr>
-              <a:t>      </a:t>
-            </a:r>
-            <a:r>
-              <a:rPr sz="1032">
-                <a:solidFill>
-                  <a:srgbClr val="5C6574"/>
-                </a:solidFill>
-                <a:latin typeface="Consolas"/>
-                <a:ea typeface="Consolas"/>
-                <a:cs typeface="Consolas"/>
-              </a:rPr>
-              <a:t>}</a:t>
-            </a:r>
           </a:p>
           <a:p xmlns:a="http://schemas.openxmlformats.org/drawingml/2006/main">
             <a:pPr>
@@ -7345,24 +7147,13 @@
             <a:r>
               <a:rPr sz="1032">
                 <a:solidFill>
-                  <a:srgbClr val="262B36"/>
-                </a:solidFill>
-                <a:latin typeface="Consolas"/>
-                <a:ea typeface="Consolas"/>
-                <a:cs typeface="Consolas"/>
-              </a:rPr>
-              <a:t>    </a:t>
-            </a:r>
-            <a:r>
-              <a:rPr sz="1032">
-                <a:solidFill>
-                  <a:srgbClr val="5C6574"/>
-                </a:solidFill>
-                <a:latin typeface="Consolas"/>
-                <a:ea typeface="Consolas"/>
-                <a:cs typeface="Consolas"/>
-              </a:rPr>
-              <a:t>]</a:t>
+                  <a:srgbClr val="55845A"/>
+                </a:solidFill>
+                <a:latin typeface="Consolas"/>
+                <a:ea typeface="Consolas"/>
+                <a:cs typeface="Consolas"/>
+              </a:rPr>
+              <a:t>// .vscode/settings.json</a:t>
             </a:r>
           </a:p>
           <a:p xmlns:a="http://schemas.openxmlformats.org/drawingml/2006/main">
@@ -7392,24 +7183,46 @@
             <a:r>
               <a:rPr sz="1032">
                 <a:solidFill>
+                  <a:srgbClr val="5C6574"/>
+                </a:solidFill>
+                <a:latin typeface="Consolas"/>
+                <a:ea typeface="Consolas"/>
+                <a:cs typeface="Consolas"/>
+              </a:rPr>
+              <a:t>{</a:t>
+            </a:r>
+            <a:r>
+              <a:rPr sz="1032">
+                <a:solidFill>
                   <a:srgbClr val="262B36"/>
                 </a:solidFill>
                 <a:latin typeface="Consolas"/>
                 <a:ea typeface="Consolas"/>
                 <a:cs typeface="Consolas"/>
               </a:rPr>
-              <a:t>  </a:t>
+              <a:t> </a:t>
             </a:r>
             <a:r>
               <a:rPr sz="1032">
                 <a:solidFill>
+                  <a:srgbClr val="A95921"/>
+                </a:solidFill>
+                <a:latin typeface="Consolas"/>
+                <a:ea typeface="Consolas"/>
+                <a:cs typeface="Consolas"/>
+              </a:rPr>
+              <a:t>"kova.ers.guardrailsProject"</a:t>
+            </a:r>
+            <a:r>
+              <a:rPr sz="1032">
+                <a:solidFill>
                   <a:srgbClr val="5C6574"/>
                 </a:solidFill>
                 <a:latin typeface="Consolas"/>
                 <a:ea typeface="Consolas"/>
                 <a:cs typeface="Consolas"/>
               </a:rPr>
-              <a:t>}</a:t>
+              <a:t>:</a:t>
             </a:r>
           </a:p>
           <a:p xmlns:a="http://schemas.openxmlformats.org/drawingml/2006/main">
@@ -7435,6 +7248,39 @@
                 <a:cs typeface="Consolas"/>
               </a:rPr>
               <a:t>15  </a:t>
+            </a:r>
+            <a:r>
+              <a:rPr sz="1032">
+                <a:solidFill>
+                  <a:srgbClr val="262B36"/>
+                </a:solidFill>
+                <a:latin typeface="Consolas"/>
+                <a:ea typeface="Consolas"/>
+                <a:cs typeface="Consolas"/>
+              </a:rPr>
+              <a:t>  </a:t>
+            </a:r>
+            <a:r>
+              <a:rPr sz="1032">
+                <a:solidFill>
+                  <a:srgbClr val="A95921"/>
+                </a:solidFill>
+                <a:latin typeface="Consolas"/>
+                <a:ea typeface="Consolas"/>
+                <a:cs typeface="Consolas"/>
+              </a:rPr>
+              <a:t>"src/EquipmentReservation.Guardrails/….csproj"</a:t>
+            </a:r>
+            <a:r>
+              <a:rPr sz="1032">
+                <a:solidFill>
+                  <a:srgbClr val="262B36"/>
+                </a:solidFill>
+                <a:latin typeface="Consolas"/>
+                <a:ea typeface="Consolas"/>
+                <a:cs typeface="Consolas"/>
+              </a:rPr>
+              <a:t> </a:t>
             </a:r>
             <a:r>
               <a:rPr sz="1032">
@@ -9322,7 +9168,18 @@
                 <a:ea typeface="Consolas"/>
                 <a:cs typeface="Consolas"/>
               </a:rPr>
-              <a:t>DangerousCommandGuardrail_BlocksDestructiveComm</a:t>
+              <a:t>DangerousCommandGuardrail_BlocksDestructiveCommands</a:t>
+            </a:r>
+            <a:r>
+              <a:rPr sz="1032">
+                <a:solidFill>
+                  <a:srgbClr val="5C6574"/>
+                </a:solidFill>
+                <a:latin typeface="Consolas"/>
+                <a:ea typeface="Consolas"/>
+                <a:cs typeface="Consolas"/>
+              </a:rPr>
+              <a:t>(</a:t>
             </a:r>
           </a:p>
           <a:p xmlns:a="http://schemas.openxmlformats.org/drawingml/2006/main">
@@ -9358,29 +9215,29 @@
                 <a:ea typeface="Consolas"/>
                 <a:cs typeface="Consolas"/>
               </a:rPr>
-              <a:t>    ands</a:t>
+              <a:t>    </a:t>
+            </a:r>
+            <a:r>
+              <a:rPr sz="1032" b="1">
+                <a:solidFill>
+                  <a:srgbClr val="005CC5"/>
+                </a:solidFill>
+                <a:latin typeface="Consolas"/>
+                <a:ea typeface="Consolas"/>
+                <a:cs typeface="Consolas"/>
+              </a:rPr>
+              <a:t>string</a:t>
             </a:r>
             <a:r>
               <a:rPr sz="1032">
                 <a:solidFill>
-                  <a:srgbClr val="5C6574"/>
-                </a:solidFill>
-                <a:latin typeface="Consolas"/>
-                <a:ea typeface="Consolas"/>
-                <a:cs typeface="Consolas"/>
-              </a:rPr>
-              <a:t>(</a:t>
-            </a:r>
-            <a:r>
-              <a:rPr sz="1032" b="1">
-                <a:solidFill>
-                  <a:srgbClr val="005CC5"/>
-                </a:solidFill>
-                <a:latin typeface="Consolas"/>
-                <a:ea typeface="Consolas"/>
-                <a:cs typeface="Consolas"/>
-              </a:rPr>
-              <a:t>string</a:t>
+                  <a:srgbClr val="262B36"/>
+                </a:solidFill>
+                <a:latin typeface="Consolas"/>
+                <a:ea typeface="Consolas"/>
+                <a:cs typeface="Consolas"/>
+              </a:rPr>
+              <a:t> </a:t>
             </a:r>
             <a:r>
               <a:rPr sz="1032">
@@ -9391,7 +9248,7 @@
                 <a:ea typeface="Consolas"/>
                 <a:cs typeface="Consolas"/>
               </a:rPr>
-              <a:t> command</a:t>
+              <a:t>command</a:t>
             </a:r>
             <a:r>
               <a:rPr sz="1032">
@@ -9496,11 +9353,33 @@
                 <a:ea typeface="Consolas"/>
                 <a:cs typeface="Consolas"/>
               </a:rPr>
-              <a:t> guardrail </a:t>
+              <a:t> </a:t>
             </a:r>
             <a:r>
               <a:rPr sz="1032">
                 <a:solidFill>
+                  <a:srgbClr val="262B36"/>
+                </a:solidFill>
+                <a:latin typeface="Consolas"/>
+                <a:ea typeface="Consolas"/>
+                <a:cs typeface="Consolas"/>
+              </a:rPr>
+              <a:t>result</a:t>
+            </a:r>
+            <a:r>
+              <a:rPr sz="1032">
+                <a:solidFill>
+                  <a:srgbClr val="262B36"/>
+                </a:solidFill>
+                <a:latin typeface="Consolas"/>
+                <a:ea typeface="Consolas"/>
+                <a:cs typeface="Consolas"/>
+              </a:rPr>
+              <a:t> </a:t>
+            </a:r>
+            <a:r>
+              <a:rPr sz="1032">
+                <a:solidFill>
                   <a:srgbClr val="5C6574"/>
                 </a:solidFill>
                 <a:latin typeface="Consolas"/>
@@ -9562,7 +9441,29 @@
                 <a:ea typeface="Consolas"/>
                 <a:cs typeface="Consolas"/>
               </a:rPr>
-              <a:t>();</a:t>
+              <a:t>().</a:t>
+            </a:r>
+            <a:r>
+              <a:rPr sz="1032" b="1">
+                <a:solidFill>
+                  <a:srgbClr val="7442C8"/>
+                </a:solidFill>
+                <a:latin typeface="Consolas"/>
+                <a:ea typeface="Consolas"/>
+                <a:cs typeface="Consolas"/>
+              </a:rPr>
+              <a:t>Evaluate</a:t>
+            </a:r>
+            <a:r>
+              <a:rPr sz="1032">
+                <a:solidFill>
+                  <a:srgbClr val="5C6574"/>
+                </a:solidFill>
+                <a:latin typeface="Consolas"/>
+                <a:ea typeface="Consolas"/>
+                <a:cs typeface="Consolas"/>
+              </a:rPr>
+              <a:t>(</a:t>
             </a:r>
           </a:p>
           <a:p xmlns:a="http://schemas.openxmlformats.org/drawingml/2006/main">
@@ -9598,7 +9499,7 @@
                 <a:ea typeface="Consolas"/>
                 <a:cs typeface="Consolas"/>
               </a:rPr>
-              <a:t>  </a:t>
+              <a:t>      </a:t>
             </a:r>
             <a:r>
               <a:rPr sz="1032" b="1">
@@ -9609,7 +9510,7 @@
                 <a:ea typeface="Consolas"/>
                 <a:cs typeface="Consolas"/>
               </a:rPr>
-              <a:t>var</a:t>
+              <a:t>new</a:t>
             </a:r>
             <a:r>
               <a:rPr sz="1032">
@@ -9620,7 +9521,18 @@
                 <a:ea typeface="Consolas"/>
                 <a:cs typeface="Consolas"/>
               </a:rPr>
-              <a:t> result </a:t>
+              <a:t> </a:t>
+            </a:r>
+            <a:r>
+              <a:rPr sz="1032" b="1">
+                <a:solidFill>
+                  <a:srgbClr val="7442C8"/>
+                </a:solidFill>
+                <a:latin typeface="Consolas"/>
+                <a:ea typeface="Consolas"/>
+                <a:cs typeface="Consolas"/>
+              </a:rPr>
+              <a:t>ToolInvocation</a:t>
             </a:r>
             <a:r>
               <a:rPr sz="1032">
@@ -9631,40 +9543,84 @@
                 <a:ea typeface="Consolas"/>
                 <a:cs typeface="Consolas"/>
               </a:rPr>
-              <a:t>=</a:t>
+              <a:t>(</a:t>
             </a:r>
             <a:r>
               <a:rPr sz="1032">
                 <a:solidFill>
+                  <a:srgbClr val="A95921"/>
+                </a:solidFill>
+                <a:latin typeface="Consolas"/>
+                <a:ea typeface="Consolas"/>
+                <a:cs typeface="Consolas"/>
+              </a:rPr>
+              <a:t>"Bash"</a:t>
+            </a:r>
+            <a:r>
+              <a:rPr sz="1032">
+                <a:solidFill>
+                  <a:srgbClr val="5C6574"/>
+                </a:solidFill>
+                <a:latin typeface="Consolas"/>
+                <a:ea typeface="Consolas"/>
+                <a:cs typeface="Consolas"/>
+              </a:rPr>
+              <a:t>,</a:t>
+            </a:r>
+            <a:r>
+              <a:rPr sz="1032">
+                <a:solidFill>
                   <a:srgbClr val="262B36"/>
                 </a:solidFill>
                 <a:latin typeface="Consolas"/>
                 <a:ea typeface="Consolas"/>
                 <a:cs typeface="Consolas"/>
               </a:rPr>
-              <a:t> guardrail</a:t>
+              <a:t> </a:t>
             </a:r>
             <a:r>
               <a:rPr sz="1032">
                 <a:solidFill>
+                  <a:srgbClr val="262B36"/>
+                </a:solidFill>
+                <a:latin typeface="Consolas"/>
+                <a:ea typeface="Consolas"/>
+                <a:cs typeface="Consolas"/>
+              </a:rPr>
+              <a:t>command</a:t>
+            </a:r>
+            <a:r>
+              <a:rPr sz="1032">
+                <a:solidFill>
                   <a:srgbClr val="5C6574"/>
                 </a:solidFill>
                 <a:latin typeface="Consolas"/>
                 <a:ea typeface="Consolas"/>
                 <a:cs typeface="Consolas"/>
               </a:rPr>
-              <a:t>.</a:t>
+              <a:t>,</a:t>
+            </a:r>
+            <a:r>
+              <a:rPr sz="1032">
+                <a:solidFill>
+                  <a:srgbClr val="262B36"/>
+                </a:solidFill>
+                <a:latin typeface="Consolas"/>
+                <a:ea typeface="Consolas"/>
+                <a:cs typeface="Consolas"/>
+              </a:rPr>
+              <a:t> </a:t>
             </a:r>
             <a:r>
               <a:rPr sz="1032" b="1">
                 <a:solidFill>
-                  <a:srgbClr val="7442C8"/>
-                </a:solidFill>
-                <a:latin typeface="Consolas"/>
-                <a:ea typeface="Consolas"/>
-                <a:cs typeface="Consolas"/>
-              </a:rPr>
-              <a:t>Evaluate</a:t>
+                  <a:srgbClr val="005CC5"/>
+                </a:solidFill>
+                <a:latin typeface="Consolas"/>
+                <a:ea typeface="Consolas"/>
+                <a:cs typeface="Consolas"/>
+              </a:rPr>
+              <a:t>null</a:t>
             </a:r>
             <a:r>
               <a:rPr sz="1032">
@@ -9675,51 +9631,7 @@
                 <a:ea typeface="Consolas"/>
                 <a:cs typeface="Consolas"/>
               </a:rPr>
-              <a:t>(</a:t>
-            </a:r>
-            <a:r>
-              <a:rPr sz="1032" b="1">
-                <a:solidFill>
-                  <a:srgbClr val="005CC5"/>
-                </a:solidFill>
-                <a:latin typeface="Consolas"/>
-                <a:ea typeface="Consolas"/>
-                <a:cs typeface="Consolas"/>
-              </a:rPr>
-              <a:t>new</a:t>
-            </a:r>
-            <a:r>
-              <a:rPr sz="1032">
-                <a:solidFill>
-                  <a:srgbClr val="262B36"/>
-                </a:solidFill>
-                <a:latin typeface="Consolas"/>
-                <a:ea typeface="Consolas"/>
-                <a:cs typeface="Consolas"/>
-              </a:rPr>
-              <a:t> </a:t>
-            </a:r>
-            <a:r>
-              <a:rPr sz="1032" b="1">
-                <a:solidFill>
-                  <a:srgbClr val="7442C8"/>
-                </a:solidFill>
-                <a:latin typeface="Consolas"/>
-                <a:ea typeface="Consolas"/>
-                <a:cs typeface="Consolas"/>
-              </a:rPr>
-              <a:t>ToolInvocation</a:t>
-            </a:r>
-            <a:r>
-              <a:rPr sz="1032">
-                <a:solidFill>
-                  <a:srgbClr val="5C6574"/>
-                </a:solidFill>
-                <a:latin typeface="Consolas"/>
-                <a:ea typeface="Consolas"/>
-                <a:cs typeface="Consolas"/>
-              </a:rPr>
-              <a:t>(</a:t>
+              <a:t>));</a:t>
             </a:r>
           </a:p>
           <a:p xmlns:a="http://schemas.openxmlformats.org/drawingml/2006/main">
@@ -9755,18 +9667,40 @@
                 <a:ea typeface="Consolas"/>
                 <a:cs typeface="Consolas"/>
               </a:rPr>
-              <a:t>      </a:t>
+              <a:t>  </a:t>
+            </a:r>
+            <a:r>
+              <a:rPr sz="1032" b="1">
+                <a:solidFill>
+                  <a:srgbClr val="7442C8"/>
+                </a:solidFill>
+                <a:latin typeface="Consolas"/>
+                <a:ea typeface="Consolas"/>
+                <a:cs typeface="Consolas"/>
+              </a:rPr>
+              <a:t>Assert</a:t>
             </a:r>
             <a:r>
               <a:rPr sz="1032">
                 <a:solidFill>
-                  <a:srgbClr val="A95921"/>
-                </a:solidFill>
-                <a:latin typeface="Consolas"/>
-                <a:ea typeface="Consolas"/>
-                <a:cs typeface="Consolas"/>
-              </a:rPr>
-              <a:t>"Bash"</a:t>
+                  <a:srgbClr val="5C6574"/>
+                </a:solidFill>
+                <a:latin typeface="Consolas"/>
+                <a:ea typeface="Consolas"/>
+                <a:cs typeface="Consolas"/>
+              </a:rPr>
+              <a:t>.</a:t>
+            </a:r>
+            <a:r>
+              <a:rPr sz="1032" b="1">
+                <a:solidFill>
+                  <a:srgbClr val="7442C8"/>
+                </a:solidFill>
+                <a:latin typeface="Consolas"/>
+                <a:ea typeface="Consolas"/>
+                <a:cs typeface="Consolas"/>
+              </a:rPr>
+              <a:t>That</a:t>
             </a:r>
             <a:r>
               <a:rPr sz="1032">
@@ -9777,6 +9711,50 @@
                 <a:ea typeface="Consolas"/>
                 <a:cs typeface="Consolas"/>
               </a:rPr>
+              <a:t>(</a:t>
+            </a:r>
+            <a:r>
+              <a:rPr sz="1032">
+                <a:solidFill>
+                  <a:srgbClr val="262B36"/>
+                </a:solidFill>
+                <a:latin typeface="Consolas"/>
+                <a:ea typeface="Consolas"/>
+                <a:cs typeface="Consolas"/>
+              </a:rPr>
+              <a:t>result</a:t>
+            </a:r>
+            <a:r>
+              <a:rPr sz="1032">
+                <a:solidFill>
+                  <a:srgbClr val="5C6574"/>
+                </a:solidFill>
+                <a:latin typeface="Consolas"/>
+                <a:ea typeface="Consolas"/>
+                <a:cs typeface="Consolas"/>
+              </a:rPr>
+              <a:t>.</a:t>
+            </a:r>
+            <a:r>
+              <a:rPr sz="1032" b="1">
+                <a:solidFill>
+                  <a:srgbClr val="7442C8"/>
+                </a:solidFill>
+                <a:latin typeface="Consolas"/>
+                <a:ea typeface="Consolas"/>
+                <a:cs typeface="Consolas"/>
+              </a:rPr>
+              <a:t>Allowed</a:t>
+            </a:r>
+            <a:r>
+              <a:rPr sz="1032">
+                <a:solidFill>
+                  <a:srgbClr val="5C6574"/>
+                </a:solidFill>
+                <a:latin typeface="Consolas"/>
+                <a:ea typeface="Consolas"/>
+                <a:cs typeface="Consolas"/>
+              </a:rPr>
               <a:t>,</a:t>
             </a:r>
             <a:r>
@@ -9788,7 +9766,18 @@
                 <a:ea typeface="Consolas"/>
                 <a:cs typeface="Consolas"/>
               </a:rPr>
-              <a:t> command</a:t>
+              <a:t> </a:t>
+            </a:r>
+            <a:r>
+              <a:rPr sz="1032" b="1">
+                <a:solidFill>
+                  <a:srgbClr val="7442C8"/>
+                </a:solidFill>
+                <a:latin typeface="Consolas"/>
+                <a:ea typeface="Consolas"/>
+                <a:cs typeface="Consolas"/>
+              </a:rPr>
+              <a:t>Is</a:t>
             </a:r>
             <a:r>
               <a:rPr sz="1032">
@@ -9799,40 +9788,29 @@
                 <a:ea typeface="Consolas"/>
                 <a:cs typeface="Consolas"/>
               </a:rPr>
-              <a:t>,</a:t>
+              <a:t>.</a:t>
+            </a:r>
+            <a:r>
+              <a:rPr sz="1032" b="1">
+                <a:solidFill>
+                  <a:srgbClr val="7442C8"/>
+                </a:solidFill>
+                <a:latin typeface="Consolas"/>
+                <a:ea typeface="Consolas"/>
+                <a:cs typeface="Consolas"/>
+              </a:rPr>
+              <a:t>False</a:t>
             </a:r>
             <a:r>
               <a:rPr sz="1032">
                 <a:solidFill>
-                  <a:srgbClr val="262B36"/>
-                </a:solidFill>
-                <a:latin typeface="Consolas"/>
-                <a:ea typeface="Consolas"/>
-                <a:cs typeface="Consolas"/>
-              </a:rPr>
-              <a:t> </a:t>
-            </a:r>
-            <a:r>
-              <a:rPr sz="1032" b="1">
-                <a:solidFill>
-                  <a:srgbClr val="005CC5"/>
-                </a:solidFill>
-                <a:latin typeface="Consolas"/>
-                <a:ea typeface="Consolas"/>
-                <a:cs typeface="Consolas"/>
-              </a:rPr>
-              <a:t>null</a:t>
-            </a:r>
-            <a:r>
-              <a:rPr sz="1032">
-                <a:solidFill>
                   <a:srgbClr val="5C6574"/>
                 </a:solidFill>
                 <a:latin typeface="Consolas"/>
                 <a:ea typeface="Consolas"/>
                 <a:cs typeface="Consolas"/>
               </a:rPr>
-              <a:t>));</a:t>
+              <a:t>);</a:t>
             </a:r>
           </a:p>
           <a:p xmlns:a="http://schemas.openxmlformats.org/drawingml/2006/main">
@@ -9862,156 +9840,13 @@
             <a:r>
               <a:rPr sz="1032">
                 <a:solidFill>
-                  <a:srgbClr val="262B36"/>
-                </a:solidFill>
-                <a:latin typeface="Consolas"/>
-                <a:ea typeface="Consolas"/>
-                <a:cs typeface="Consolas"/>
-              </a:rPr>
-              <a:t>  </a:t>
-            </a:r>
-            <a:r>
-              <a:rPr sz="1032" b="1">
-                <a:solidFill>
-                  <a:srgbClr val="7442C8"/>
-                </a:solidFill>
-                <a:latin typeface="Consolas"/>
-                <a:ea typeface="Consolas"/>
-                <a:cs typeface="Consolas"/>
-              </a:rPr>
-              <a:t>Assert</a:t>
-            </a:r>
-            <a:r>
-              <a:rPr sz="1032">
-                <a:solidFill>
                   <a:srgbClr val="5C6574"/>
                 </a:solidFill>
                 <a:latin typeface="Consolas"/>
                 <a:ea typeface="Consolas"/>
                 <a:cs typeface="Consolas"/>
               </a:rPr>
-              <a:t>.</a:t>
-            </a:r>
-            <a:r>
-              <a:rPr sz="1032" b="1">
-                <a:solidFill>
-                  <a:srgbClr val="7442C8"/>
-                </a:solidFill>
-                <a:latin typeface="Consolas"/>
-                <a:ea typeface="Consolas"/>
-                <a:cs typeface="Consolas"/>
-              </a:rPr>
-              <a:t>That</a:t>
-            </a:r>
-            <a:r>
-              <a:rPr sz="1032">
-                <a:solidFill>
-                  <a:srgbClr val="5C6574"/>
-                </a:solidFill>
-                <a:latin typeface="Consolas"/>
-                <a:ea typeface="Consolas"/>
-                <a:cs typeface="Consolas"/>
-              </a:rPr>
-              <a:t>(</a:t>
-            </a:r>
-            <a:r>
-              <a:rPr sz="1032">
-                <a:solidFill>
-                  <a:srgbClr val="262B36"/>
-                </a:solidFill>
-                <a:latin typeface="Consolas"/>
-                <a:ea typeface="Consolas"/>
-                <a:cs typeface="Consolas"/>
-              </a:rPr>
-              <a:t>result</a:t>
-            </a:r>
-            <a:r>
-              <a:rPr sz="1032">
-                <a:solidFill>
-                  <a:srgbClr val="5C6574"/>
-                </a:solidFill>
-                <a:latin typeface="Consolas"/>
-                <a:ea typeface="Consolas"/>
-                <a:cs typeface="Consolas"/>
-              </a:rPr>
-              <a:t>.</a:t>
-            </a:r>
-            <a:r>
-              <a:rPr sz="1032" b="1">
-                <a:solidFill>
-                  <a:srgbClr val="7442C8"/>
-                </a:solidFill>
-                <a:latin typeface="Consolas"/>
-                <a:ea typeface="Consolas"/>
-                <a:cs typeface="Consolas"/>
-              </a:rPr>
-              <a:t>Allowed</a:t>
-            </a:r>
-            <a:r>
-              <a:rPr sz="1032">
-                <a:solidFill>
-                  <a:srgbClr val="5C6574"/>
-                </a:solidFill>
-                <a:latin typeface="Consolas"/>
-                <a:ea typeface="Consolas"/>
-                <a:cs typeface="Consolas"/>
-              </a:rPr>
-              <a:t>,</a:t>
-            </a:r>
-            <a:r>
-              <a:rPr sz="1032">
-                <a:solidFill>
-                  <a:srgbClr val="262B36"/>
-                </a:solidFill>
-                <a:latin typeface="Consolas"/>
-                <a:ea typeface="Consolas"/>
-                <a:cs typeface="Consolas"/>
-              </a:rPr>
-              <a:t> </a:t>
-            </a:r>
-            <a:r>
-              <a:rPr sz="1032" b="1">
-                <a:solidFill>
-                  <a:srgbClr val="7442C8"/>
-                </a:solidFill>
-                <a:latin typeface="Consolas"/>
-                <a:ea typeface="Consolas"/>
-                <a:cs typeface="Consolas"/>
-              </a:rPr>
-              <a:t>Is</a:t>
-            </a:r>
-            <a:r>
-              <a:rPr sz="1032">
-                <a:solidFill>
-                  <a:srgbClr val="5C6574"/>
-                </a:solidFill>
-                <a:latin typeface="Consolas"/>
-                <a:ea typeface="Consolas"/>
-                <a:cs typeface="Consolas"/>
-              </a:rPr>
-              <a:t>.</a:t>
-            </a:r>
-            <a:r>
-              <a:rPr sz="1032" b="1">
-                <a:solidFill>
-                  <a:srgbClr val="7442C8"/>
-                </a:solidFill>
-                <a:latin typeface="Consolas"/>
-                <a:ea typeface="Consolas"/>
-                <a:cs typeface="Consolas"/>
-              </a:rPr>
-              <a:t>False</a:t>
-            </a:r>
-            <a:r>
-              <a:rPr sz="1032">
-                <a:solidFill>
-                  <a:srgbClr val="5C6574"/>
-                </a:solidFill>
-                <a:latin typeface="Consolas"/>
-                <a:ea typeface="Consolas"/>
-                <a:cs typeface="Consolas"/>
-              </a:rPr>
-              <a:t>);</a:t>
+              <a:t>}</a:t>
             </a:r>
           </a:p>
           <a:p xmlns:a="http://schemas.openxmlformats.org/drawingml/2006/main">
@@ -10038,17 +9873,6 @@
               </a:rPr>
               <a:t>10  </a:t>
             </a:r>
-            <a:r>
-              <a:rPr sz="1032">
-                <a:solidFill>
-                  <a:srgbClr val="5C6574"/>
-                </a:solidFill>
-                <a:latin typeface="Consolas"/>
-                <a:ea typeface="Consolas"/>
-                <a:cs typeface="Consolas"/>
-              </a:rPr>
-              <a:t>}</a:t>
-            </a:r>
           </a:p>
           <a:p xmlns:a="http://schemas.openxmlformats.org/drawingml/2006/main">
             <a:pPr>
@@ -10074,6 +9898,61 @@
               </a:rPr>
               <a:t>11  </a:t>
             </a:r>
+            <a:r>
+              <a:rPr sz="1032">
+                <a:solidFill>
+                  <a:srgbClr val="5C6574"/>
+                </a:solidFill>
+                <a:latin typeface="Consolas"/>
+                <a:ea typeface="Consolas"/>
+                <a:cs typeface="Consolas"/>
+              </a:rPr>
+              <a:t>[</a:t>
+            </a:r>
+            <a:r>
+              <a:rPr sz="1032" b="1">
+                <a:solidFill>
+                  <a:srgbClr val="7442C8"/>
+                </a:solidFill>
+                <a:latin typeface="Consolas"/>
+                <a:ea typeface="Consolas"/>
+                <a:cs typeface="Consolas"/>
+              </a:rPr>
+              <a:t>TestCase</a:t>
+            </a:r>
+            <a:r>
+              <a:rPr sz="1032">
+                <a:solidFill>
+                  <a:srgbClr val="5C6574"/>
+                </a:solidFill>
+                <a:latin typeface="Consolas"/>
+                <a:ea typeface="Consolas"/>
+                <a:cs typeface="Consolas"/>
+              </a:rPr>
+              <a:t>(</a:t>
+            </a:r>
+            <a:r>
+              <a:rPr sz="1032">
+                <a:solidFill>
+                  <a:srgbClr val="A95921"/>
+                </a:solidFill>
+                <a:latin typeface="Consolas"/>
+                <a:ea typeface="Consolas"/>
+                <a:cs typeface="Consolas"/>
+              </a:rPr>
+              <a:t>"/repo/.env"</a:t>
+            </a:r>
+            <a:r>
+              <a:rPr sz="1032">
+                <a:solidFill>
+                  <a:srgbClr val="5C6574"/>
+                </a:solidFill>
+                <a:latin typeface="Consolas"/>
+                <a:ea typeface="Consolas"/>
+                <a:cs typeface="Consolas"/>
+              </a:rPr>
+              <a:t>)]</a:t>
+            </a:r>
           </a:p>
           <a:p xmlns:a="http://schemas.openxmlformats.org/drawingml/2006/main">
             <a:pPr>
@@ -10119,7 +9998,7 @@
                 <a:ea typeface="Consolas"/>
                 <a:cs typeface="Consolas"/>
               </a:rPr>
-              <a:t>Test</a:t>
+              <a:t>TestCase</a:t>
             </a:r>
             <a:r>
               <a:rPr sz="1032">
@@ -10130,7 +10009,29 @@
                 <a:ea typeface="Consolas"/>
                 <a:cs typeface="Consolas"/>
               </a:rPr>
-              <a:t>]</a:t>
+              <a:t>(</a:t>
+            </a:r>
+            <a:r>
+              <a:rPr sz="1032">
+                <a:solidFill>
+                  <a:srgbClr val="A95921"/>
+                </a:solidFill>
+                <a:latin typeface="Consolas"/>
+                <a:ea typeface="Consolas"/>
+                <a:cs typeface="Consolas"/>
+              </a:rPr>
+              <a:t>".env.production"</a:t>
+            </a:r>
+            <a:r>
+              <a:rPr sz="1032">
+                <a:solidFill>
+                  <a:srgbClr val="5C6574"/>
+                </a:solidFill>
+                <a:latin typeface="Consolas"/>
+                <a:ea typeface="Consolas"/>
+                <a:cs typeface="Consolas"/>
+              </a:rPr>
+              <a:t>)]</a:t>
             </a:r>
           </a:p>
           <a:p xmlns:a="http://schemas.openxmlformats.org/drawingml/2006/main">
@@ -10210,7 +10111,7 @@
                 <a:ea typeface="Consolas"/>
                 <a:cs typeface="Consolas"/>
               </a:rPr>
-              <a:t>SensitiveFileGuardrail_BlocksEnvFile</a:t>
+              <a:t>SensitiveFileGuardrail_BlocksSecretFiles</a:t>
             </a:r>
             <a:r>
               <a:rPr sz="1032">
@@ -10221,7 +10122,51 @@
                 <a:ea typeface="Consolas"/>
                 <a:cs typeface="Consolas"/>
               </a:rPr>
-              <a:t>()</a:t>
+              <a:t>(</a:t>
+            </a:r>
+            <a:r>
+              <a:rPr sz="1032" b="1">
+                <a:solidFill>
+                  <a:srgbClr val="005CC5"/>
+                </a:solidFill>
+                <a:latin typeface="Consolas"/>
+                <a:ea typeface="Consolas"/>
+                <a:cs typeface="Consolas"/>
+              </a:rPr>
+              <a:t>string</a:t>
+            </a:r>
+            <a:r>
+              <a:rPr sz="1032">
+                <a:solidFill>
+                  <a:srgbClr val="262B36"/>
+                </a:solidFill>
+                <a:latin typeface="Consolas"/>
+                <a:ea typeface="Consolas"/>
+                <a:cs typeface="Consolas"/>
+              </a:rPr>
+              <a:t> </a:t>
+            </a:r>
+            <a:r>
+              <a:rPr sz="1032">
+                <a:solidFill>
+                  <a:srgbClr val="262B36"/>
+                </a:solidFill>
+                <a:latin typeface="Consolas"/>
+                <a:ea typeface="Consolas"/>
+                <a:cs typeface="Consolas"/>
+              </a:rPr>
+              <a:t>filePath</a:t>
+            </a:r>
+            <a:r>
+              <a:rPr sz="1032">
+                <a:solidFill>
+                  <a:srgbClr val="5C6574"/>
+                </a:solidFill>
+                <a:latin typeface="Consolas"/>
+                <a:ea typeface="Consolas"/>
+                <a:cs typeface="Consolas"/>
+              </a:rPr>
+              <a:t>)</a:t>
             </a:r>
           </a:p>
           <a:p xmlns:a="http://schemas.openxmlformats.org/drawingml/2006/main">
@@ -10315,11 +10260,33 @@
                 <a:ea typeface="Consolas"/>
                 <a:cs typeface="Consolas"/>
               </a:rPr>
-              <a:t> result </a:t>
+              <a:t> </a:t>
             </a:r>
             <a:r>
               <a:rPr sz="1032">
                 <a:solidFill>
+                  <a:srgbClr val="262B36"/>
+                </a:solidFill>
+                <a:latin typeface="Consolas"/>
+                <a:ea typeface="Consolas"/>
+                <a:cs typeface="Consolas"/>
+              </a:rPr>
+              <a:t>result</a:t>
+            </a:r>
+            <a:r>
+              <a:rPr sz="1032">
+                <a:solidFill>
+                  <a:srgbClr val="262B36"/>
+                </a:solidFill>
+                <a:latin typeface="Consolas"/>
+                <a:ea typeface="Consolas"/>
+                <a:cs typeface="Consolas"/>
+              </a:rPr>
+              <a:t> </a:t>
+            </a:r>
+            <a:r>
+              <a:rPr sz="1032">
+                <a:solidFill>
                   <a:srgbClr val="5C6574"/>
                 </a:solidFill>
                 <a:latin typeface="Consolas"/>
@@ -10337,18 +10304,51 @@
                 <a:ea typeface="Consolas"/>
                 <a:cs typeface="Consolas"/>
               </a:rPr>
-              <a:t> guardrail</a:t>
+              <a:t> </a:t>
+            </a:r>
+            <a:r>
+              <a:rPr sz="1032" b="1">
+                <a:solidFill>
+                  <a:srgbClr val="005CC5"/>
+                </a:solidFill>
+                <a:latin typeface="Consolas"/>
+                <a:ea typeface="Consolas"/>
+                <a:cs typeface="Consolas"/>
+              </a:rPr>
+              <a:t>new</a:t>
             </a:r>
             <a:r>
               <a:rPr sz="1032">
                 <a:solidFill>
+                  <a:srgbClr val="262B36"/>
+                </a:solidFill>
+                <a:latin typeface="Consolas"/>
+                <a:ea typeface="Consolas"/>
+                <a:cs typeface="Consolas"/>
+              </a:rPr>
+              <a:t> </a:t>
+            </a:r>
+            <a:r>
+              <a:rPr sz="1032" b="1">
+                <a:solidFill>
+                  <a:srgbClr val="7442C8"/>
+                </a:solidFill>
+                <a:latin typeface="Consolas"/>
+                <a:ea typeface="Consolas"/>
+                <a:cs typeface="Consolas"/>
+              </a:rPr>
+              <a:t>SensitiveFileGuardrail</a:t>
+            </a:r>
+            <a:r>
+              <a:rPr sz="1032">
+                <a:solidFill>
                   <a:srgbClr val="5C6574"/>
                 </a:solidFill>
                 <a:latin typeface="Consolas"/>
                 <a:ea typeface="Consolas"/>
                 <a:cs typeface="Consolas"/>
               </a:rPr>
-              <a:t>.</a:t>
+              <a:t>().</a:t>
             </a:r>
             <a:r>
               <a:rPr sz="1032" b="1">
@@ -10360,50 +10360,6 @@
                 <a:cs typeface="Consolas"/>
               </a:rPr>
               <a:t>Evaluate</a:t>
-            </a:r>
-            <a:r>
-              <a:rPr sz="1032">
-                <a:solidFill>
-                  <a:srgbClr val="5C6574"/>
-                </a:solidFill>
-                <a:latin typeface="Consolas"/>
-                <a:ea typeface="Consolas"/>
-                <a:cs typeface="Consolas"/>
-              </a:rPr>
-              <a:t>(</a:t>
-            </a:r>
-            <a:r>
-              <a:rPr sz="1032" b="1">
-                <a:solidFill>
-                  <a:srgbClr val="005CC5"/>
-                </a:solidFill>
-                <a:latin typeface="Consolas"/>
-                <a:ea typeface="Consolas"/>
-                <a:cs typeface="Consolas"/>
-              </a:rPr>
-              <a:t>new</a:t>
-            </a:r>
-            <a:r>
-              <a:rPr sz="1032">
-                <a:solidFill>
-                  <a:srgbClr val="262B36"/>
-                </a:solidFill>
-                <a:latin typeface="Consolas"/>
-                <a:ea typeface="Consolas"/>
-                <a:cs typeface="Consolas"/>
-              </a:rPr>
-              <a:t> </a:t>
-            </a:r>
-            <a:r>
-              <a:rPr sz="1032" b="1">
-                <a:solidFill>
-                  <a:srgbClr val="7442C8"/>
-                </a:solidFill>
-                <a:latin typeface="Consolas"/>
-                <a:ea typeface="Consolas"/>
-                <a:cs typeface="Consolas"/>
-              </a:rPr>
-              <a:t>ToolInvocation</a:t>
             </a:r>
             <a:r>
               <a:rPr sz="1032">
@@ -10453,8 +10409,52 @@
               <a:t>      </a:t>
             </a:r>
             <a:r>
+              <a:rPr sz="1032" b="1">
+                <a:solidFill>
+                  <a:srgbClr val="005CC5"/>
+                </a:solidFill>
+                <a:latin typeface="Consolas"/>
+                <a:ea typeface="Consolas"/>
+                <a:cs typeface="Consolas"/>
+              </a:rPr>
+              <a:t>new</a:t>
+            </a:r>
+            <a:r>
               <a:rPr sz="1032">
                 <a:solidFill>
+                  <a:srgbClr val="262B36"/>
+                </a:solidFill>
+                <a:latin typeface="Consolas"/>
+                <a:ea typeface="Consolas"/>
+                <a:cs typeface="Consolas"/>
+              </a:rPr>
+              <a:t> </a:t>
+            </a:r>
+            <a:r>
+              <a:rPr sz="1032" b="1">
+                <a:solidFill>
+                  <a:srgbClr val="7442C8"/>
+                </a:solidFill>
+                <a:latin typeface="Consolas"/>
+                <a:ea typeface="Consolas"/>
+                <a:cs typeface="Consolas"/>
+              </a:rPr>
+              <a:t>ToolInvocation</a:t>
+            </a:r>
+            <a:r>
+              <a:rPr sz="1032">
+                <a:solidFill>
+                  <a:srgbClr val="5C6574"/>
+                </a:solidFill>
+                <a:latin typeface="Consolas"/>
+                <a:ea typeface="Consolas"/>
+                <a:cs typeface="Consolas"/>
+              </a:rPr>
+              <a:t>(</a:t>
+            </a:r>
+            <a:r>
+              <a:rPr sz="1032">
+                <a:solidFill>
                   <a:srgbClr val="A95921"/>
                 </a:solidFill>
                 <a:latin typeface="Consolas"/>
@@ -10521,13 +10521,13 @@
             <a:r>
               <a:rPr sz="1032">
                 <a:solidFill>
-                  <a:srgbClr val="A95921"/>
-                </a:solidFill>
-                <a:latin typeface="Consolas"/>
-                <a:ea typeface="Consolas"/>
-                <a:cs typeface="Consolas"/>
-              </a:rPr>
-              <a:t>"/repo/.env"</a:t>
+                  <a:srgbClr val="262B36"/>
+                </a:solidFill>
+                <a:latin typeface="Consolas"/>
+                <a:ea typeface="Consolas"/>
+                <a:cs typeface="Consolas"/>
+              </a:rPr>
+              <a:t>filePath</a:t>
             </a:r>
             <a:r>
               <a:rPr sz="1032">
@@ -12986,7 +12986,7 @@
                 <a:ea typeface="Aptos"/>
                 <a:cs typeface="Aptos"/>
               </a:rPr>
-              <a:t>Unit тестови и eval сценарији покривају различите нивое провере.</a:t>
+              <a:t>Сценарији у evals/ имају исти облик: kind, skill, mode, must и mustNot.</a:t>
             </a:r>
           </a:p>
         </p:txBody>
@@ -18966,7 +18966,7 @@
                 <a:ea typeface="Aptos Display"/>
                 <a:cs typeface="Aptos Display"/>
               </a:rPr>
-              <a:t>Захтеви за завршну одбрану</a:t>
+              <a:t>Контролна тачка P4 и завршна одбрана</a:t>
             </a:r>
           </a:p>
         </p:txBody>
@@ -19134,7 +19134,7 @@
                 <a:ea typeface="Aptos"/>
                 <a:cs typeface="Aptos"/>
               </a:rPr>
-              <a:t>Показати захтев, backlog ставку и критеријуме.</a:t>
+              <a:t>AGENTS.md и AI_USAGE.md: пројектна правила и записи одлука.</a:t>
             </a:r>
           </a:p>
         </p:txBody>
@@ -19246,7 +19246,7 @@
                 <a:ea typeface="Aptos"/>
                 <a:cs typeface="Aptos"/>
               </a:rPr>
-              <a:t>Објаснити архитектонске границе и use-case ток.</a:t>
+              <a:t>Најмање две поновљиве процедуре: улази, излази и ограничења.</a:t>
             </a:r>
           </a:p>
         </p:txBody>
@@ -19358,7 +19358,7 @@
                 <a:ea typeface="Aptos"/>
                 <a:cs typeface="Aptos"/>
               </a:rPr>
-              <a:t>Показати тестове и резултат покретања.</a:t>
+              <a:t>Најмање три евалуациона сценарија, укључујући негативан случај.</a:t>
             </a:r>
           </a:p>
         </p:txBody>
@@ -19470,7 +19470,7 @@
                 <a:ea typeface="Aptos"/>
                 <a:cs typeface="Aptos"/>
               </a:rPr>
-              <a:t>Показати AI_USAGE и контролисан AI workflow.</a:t>
+              <a:t>Сваки члан тима објашњава свој део без генерисаног одговора.</a:t>
             </a:r>
           </a:p>
         </p:txBody>
@@ -19582,7 +19582,7 @@
                 <a:ea typeface="Aptos"/>
                 <a:cs typeface="Aptos"/>
               </a:rPr>
-              <a:t>Објаснити MCP/guardrail део без мешања са пословним језгром.</a:t>
+              <a:t>Термин: недеља од 14.12., после Вежбе 8.</a:t>
             </a:r>
           </a:p>
         </p:txBody>
@@ -20247,7 +20247,7 @@
                 <a:ea typeface="Aptos"/>
                 <a:cs typeface="Aptos"/>
               </a:rPr>
-              <a:t>PreToolUse</a:t>
+              <a:t>Kova hook</a:t>
             </a:r>
           </a:p>
         </p:txBody>
@@ -20303,7 +20303,7 @@
                 <a:ea typeface="Aptos"/>
                 <a:cs typeface="Aptos"/>
               </a:rPr>
-              <a:t>тачка</a:t>
+              <a:t>пре алата</a:t>
             </a:r>
           </a:p>
         </p:txBody>
@@ -22644,7 +22644,18 @@
                 <a:ea typeface="Consolas"/>
                 <a:cs typeface="Consolas"/>
               </a:rPr>
-              <a:t> invocation</a:t>
+              <a:t> </a:t>
+            </a:r>
+            <a:r>
+              <a:rPr sz="1032">
+                <a:solidFill>
+                  <a:srgbClr val="262B36"/>
+                </a:solidFill>
+                <a:latin typeface="Consolas"/>
+                <a:ea typeface="Consolas"/>
+                <a:cs typeface="Consolas"/>
+              </a:rPr>
+              <a:t>invocation</a:t>
             </a:r>
             <a:r>
               <a:rPr sz="1032">
@@ -22718,6 +22729,94 @@
               </a:rPr>
               <a:t> 5  </a:t>
             </a:r>
+            <a:r>
+              <a:rPr sz="1032" b="1">
+                <a:solidFill>
+                  <a:srgbClr val="005CC5"/>
+                </a:solidFill>
+                <a:latin typeface="Consolas"/>
+                <a:ea typeface="Consolas"/>
+                <a:cs typeface="Consolas"/>
+              </a:rPr>
+              <a:t>public</a:t>
+            </a:r>
+            <a:r>
+              <a:rPr sz="1032">
+                <a:solidFill>
+                  <a:srgbClr val="262B36"/>
+                </a:solidFill>
+                <a:latin typeface="Consolas"/>
+                <a:ea typeface="Consolas"/>
+                <a:cs typeface="Consolas"/>
+              </a:rPr>
+              <a:t> </a:t>
+            </a:r>
+            <a:r>
+              <a:rPr sz="1032" b="1">
+                <a:solidFill>
+                  <a:srgbClr val="005CC5"/>
+                </a:solidFill>
+                <a:latin typeface="Consolas"/>
+                <a:ea typeface="Consolas"/>
+                <a:cs typeface="Consolas"/>
+              </a:rPr>
+              <a:t>sealed</a:t>
+            </a:r>
+            <a:r>
+              <a:rPr sz="1032">
+                <a:solidFill>
+                  <a:srgbClr val="262B36"/>
+                </a:solidFill>
+                <a:latin typeface="Consolas"/>
+                <a:ea typeface="Consolas"/>
+                <a:cs typeface="Consolas"/>
+              </a:rPr>
+              <a:t> </a:t>
+            </a:r>
+            <a:r>
+              <a:rPr sz="1032" b="1">
+                <a:solidFill>
+                  <a:srgbClr val="005CC5"/>
+                </a:solidFill>
+                <a:latin typeface="Consolas"/>
+                <a:ea typeface="Consolas"/>
+                <a:cs typeface="Consolas"/>
+              </a:rPr>
+              <a:t>class</a:t>
+            </a:r>
+            <a:r>
+              <a:rPr sz="1032">
+                <a:solidFill>
+                  <a:srgbClr val="262B36"/>
+                </a:solidFill>
+                <a:latin typeface="Consolas"/>
+                <a:ea typeface="Consolas"/>
+                <a:cs typeface="Consolas"/>
+              </a:rPr>
+              <a:t> </a:t>
+            </a:r>
+            <a:r>
+              <a:rPr sz="1032" b="1">
+                <a:solidFill>
+                  <a:srgbClr val="7442C8"/>
+                </a:solidFill>
+                <a:latin typeface="Consolas"/>
+                <a:ea typeface="Consolas"/>
+                <a:cs typeface="Consolas"/>
+              </a:rPr>
+              <a:t>GuardrailEvaluator</a:t>
+            </a:r>
+            <a:r>
+              <a:rPr sz="1032">
+                <a:solidFill>
+                  <a:srgbClr val="5C6574"/>
+                </a:solidFill>
+                <a:latin typeface="Consolas"/>
+                <a:ea typeface="Consolas"/>
+                <a:cs typeface="Consolas"/>
+              </a:rPr>
+              <a:t>(</a:t>
+            </a:r>
           </a:p>
           <a:p xmlns:a="http://schemas.openxmlformats.org/drawingml/2006/main">
             <a:pPr>
@@ -22744,19 +22843,63 @@
               <a:t> 6  </a:t>
             </a:r>
             <a:r>
+              <a:rPr sz="1032">
+                <a:solidFill>
+                  <a:srgbClr val="262B36"/>
+                </a:solidFill>
+                <a:latin typeface="Consolas"/>
+                <a:ea typeface="Consolas"/>
+                <a:cs typeface="Consolas"/>
+              </a:rPr>
+              <a:t>    </a:t>
+            </a:r>
+            <a:r>
               <a:rPr sz="1032" b="1">
                 <a:solidFill>
-                  <a:srgbClr val="005CC5"/>
-                </a:solidFill>
-                <a:latin typeface="Consolas"/>
-                <a:ea typeface="Consolas"/>
-                <a:cs typeface="Consolas"/>
-              </a:rPr>
-              <a:t>public</a:t>
+                  <a:srgbClr val="7442C8"/>
+                </a:solidFill>
+                <a:latin typeface="Consolas"/>
+                <a:ea typeface="Consolas"/>
+                <a:cs typeface="Consolas"/>
+              </a:rPr>
+              <a:t>IEnumerable</a:t>
             </a:r>
             <a:r>
               <a:rPr sz="1032">
                 <a:solidFill>
+                  <a:srgbClr val="5C6574"/>
+                </a:solidFill>
+                <a:latin typeface="Consolas"/>
+                <a:ea typeface="Consolas"/>
+                <a:cs typeface="Consolas"/>
+              </a:rPr>
+              <a:t>&lt;</a:t>
+            </a:r>
+            <a:r>
+              <a:rPr sz="1032" b="1">
+                <a:solidFill>
+                  <a:srgbClr val="7442C8"/>
+                </a:solidFill>
+                <a:latin typeface="Consolas"/>
+                <a:ea typeface="Consolas"/>
+                <a:cs typeface="Consolas"/>
+              </a:rPr>
+              <a:t>IToolGuardrail</a:t>
+            </a:r>
+            <a:r>
+              <a:rPr sz="1032">
+                <a:solidFill>
+                  <a:srgbClr val="5C6574"/>
+                </a:solidFill>
+                <a:latin typeface="Consolas"/>
+                <a:ea typeface="Consolas"/>
+                <a:cs typeface="Consolas"/>
+              </a:rPr>
+              <a:t>&gt;</a:t>
+            </a:r>
+            <a:r>
+              <a:rPr sz="1032">
+                <a:solidFill>
                   <a:srgbClr val="262B36"/>
                 </a:solidFill>
                 <a:latin typeface="Consolas"/>
@@ -22766,103 +22909,70 @@
               <a:t> </a:t>
             </a:r>
             <a:r>
+              <a:rPr sz="1032">
+                <a:solidFill>
+                  <a:srgbClr val="262B36"/>
+                </a:solidFill>
+                <a:latin typeface="Consolas"/>
+                <a:ea typeface="Consolas"/>
+                <a:cs typeface="Consolas"/>
+              </a:rPr>
+              <a:t>guardrails</a:t>
+            </a:r>
+            <a:r>
+              <a:rPr sz="1032">
+                <a:solidFill>
+                  <a:srgbClr val="5C6574"/>
+                </a:solidFill>
+                <a:latin typeface="Consolas"/>
+                <a:ea typeface="Consolas"/>
+                <a:cs typeface="Consolas"/>
+              </a:rPr>
+              <a:t>)</a:t>
+            </a:r>
+            <a:r>
+              <a:rPr sz="1032">
+                <a:solidFill>
+                  <a:srgbClr val="262B36"/>
+                </a:solidFill>
+                <a:latin typeface="Consolas"/>
+                <a:ea typeface="Consolas"/>
+                <a:cs typeface="Consolas"/>
+              </a:rPr>
+              <a:t> </a:t>
+            </a:r>
+            <a:r>
+              <a:rPr sz="1032">
+                <a:solidFill>
+                  <a:srgbClr val="5C6574"/>
+                </a:solidFill>
+                <a:latin typeface="Consolas"/>
+                <a:ea typeface="Consolas"/>
+                <a:cs typeface="Consolas"/>
+              </a:rPr>
+              <a:t>:</a:t>
+            </a:r>
+            <a:r>
+              <a:rPr sz="1032">
+                <a:solidFill>
+                  <a:srgbClr val="262B36"/>
+                </a:solidFill>
+                <a:latin typeface="Consolas"/>
+                <a:ea typeface="Consolas"/>
+                <a:cs typeface="Consolas"/>
+              </a:rPr>
+              <a:t> </a:t>
+            </a:r>
+            <a:r>
               <a:rPr sz="1032" b="1">
                 <a:solidFill>
-                  <a:srgbClr val="005CC5"/>
-                </a:solidFill>
-                <a:latin typeface="Consolas"/>
-                <a:ea typeface="Consolas"/>
-                <a:cs typeface="Consolas"/>
-              </a:rPr>
-              <a:t>sealed</a:t>
-            </a:r>
-            <a:r>
-              <a:rPr sz="1032">
-                <a:solidFill>
-                  <a:srgbClr val="262B36"/>
-                </a:solidFill>
-                <a:latin typeface="Consolas"/>
-                <a:ea typeface="Consolas"/>
-                <a:cs typeface="Consolas"/>
-              </a:rPr>
-              <a:t> </a:t>
-            </a:r>
-            <a:r>
-              <a:rPr sz="1032" b="1">
-                <a:solidFill>
-                  <a:srgbClr val="005CC5"/>
-                </a:solidFill>
-                <a:latin typeface="Consolas"/>
-                <a:ea typeface="Consolas"/>
-                <a:cs typeface="Consolas"/>
-              </a:rPr>
-              <a:t>class</a:t>
-            </a:r>
-            <a:r>
-              <a:rPr sz="1032">
-                <a:solidFill>
-                  <a:srgbClr val="262B36"/>
-                </a:solidFill>
-                <a:latin typeface="Consolas"/>
-                <a:ea typeface="Consolas"/>
-                <a:cs typeface="Consolas"/>
-              </a:rPr>
-              <a:t> </a:t>
-            </a:r>
-            <a:r>
-              <a:rPr sz="1032" b="1">
-                <a:solidFill>
                   <a:srgbClr val="7442C8"/>
                 </a:solidFill>
                 <a:latin typeface="Consolas"/>
                 <a:ea typeface="Consolas"/>
                 <a:cs typeface="Consolas"/>
               </a:rPr>
-              <a:t>GuardrailEvaluator</a:t>
-            </a:r>
-            <a:r>
-              <a:rPr sz="1032">
-                <a:solidFill>
-                  <a:srgbClr val="5C6574"/>
-                </a:solidFill>
-                <a:latin typeface="Consolas"/>
-                <a:ea typeface="Consolas"/>
-                <a:cs typeface="Consolas"/>
-              </a:rPr>
-              <a:t>(</a:t>
-            </a:r>
-            <a:r>
-              <a:rPr sz="1032" b="1">
-                <a:solidFill>
-                  <a:srgbClr val="005CC5"/>
-                </a:solidFill>
-                <a:latin typeface="Consolas"/>
-                <a:ea typeface="Consolas"/>
-                <a:cs typeface="Consolas"/>
-              </a:rPr>
-              <a:t>IEnumerable</a:t>
-            </a:r>
-            <a:r>
-              <a:rPr sz="1032">
-                <a:solidFill>
-                  <a:srgbClr val="5C6574"/>
-                </a:solidFill>
-                <a:latin typeface="Consolas"/>
-                <a:ea typeface="Consolas"/>
-                <a:cs typeface="Consolas"/>
-              </a:rPr>
-              <a:t>&lt;</a:t>
-            </a:r>
-            <a:r>
-              <a:rPr sz="1032" b="1">
-                <a:solidFill>
-                  <a:srgbClr val="7442C8"/>
-                </a:solidFill>
-                <a:latin typeface="Consolas"/>
-                <a:ea typeface="Consolas"/>
-                <a:cs typeface="Consolas"/>
-              </a:rPr>
-              <a:t>IToolGua</a:t>
+              <a:t>IGuardrailEvaluator</a:t>
             </a:r>
           </a:p>
           <a:p xmlns:a="http://schemas.openxmlformats.org/drawingml/2006/main">
@@ -22892,46 +23002,13 @@
             <a:r>
               <a:rPr sz="1032">
                 <a:solidFill>
-                  <a:srgbClr val="262B36"/>
-                </a:solidFill>
-                <a:latin typeface="Consolas"/>
-                <a:ea typeface="Consolas"/>
-                <a:cs typeface="Consolas"/>
-              </a:rPr>
-              <a:t>    rdrail</a:t>
-            </a:r>
-            <a:r>
-              <a:rPr sz="1032">
-                <a:solidFill>
                   <a:srgbClr val="5C6574"/>
                 </a:solidFill>
                 <a:latin typeface="Consolas"/>
                 <a:ea typeface="Consolas"/>
                 <a:cs typeface="Consolas"/>
               </a:rPr>
-              <a:t>&gt;</a:t>
-            </a:r>
-            <a:r>
-              <a:rPr sz="1032">
-                <a:solidFill>
-                  <a:srgbClr val="262B36"/>
-                </a:solidFill>
-                <a:latin typeface="Consolas"/>
-                <a:ea typeface="Consolas"/>
-                <a:cs typeface="Consolas"/>
-              </a:rPr>
-              <a:t> guardrails</a:t>
-            </a:r>
-            <a:r>
-              <a:rPr sz="1032">
-                <a:solidFill>
-                  <a:srgbClr val="5C6574"/>
-                </a:solidFill>
-                <a:latin typeface="Consolas"/>
-                <a:ea typeface="Consolas"/>
-                <a:cs typeface="Consolas"/>
-              </a:rPr>
-              <a:t>)</a:t>
+              <a:t>{</a:t>
             </a:r>
           </a:p>
           <a:p xmlns:a="http://schemas.openxmlformats.org/drawingml/2006/main">
@@ -22961,13 +23038,123 @@
             <a:r>
               <a:rPr sz="1032">
                 <a:solidFill>
+                  <a:srgbClr val="262B36"/>
+                </a:solidFill>
+                <a:latin typeface="Consolas"/>
+                <a:ea typeface="Consolas"/>
+                <a:cs typeface="Consolas"/>
+              </a:rPr>
+              <a:t>  </a:t>
+            </a:r>
+            <a:r>
+              <a:rPr sz="1032" b="1">
+                <a:solidFill>
+                  <a:srgbClr val="005CC5"/>
+                </a:solidFill>
+                <a:latin typeface="Consolas"/>
+                <a:ea typeface="Consolas"/>
+                <a:cs typeface="Consolas"/>
+              </a:rPr>
+              <a:t>public</a:t>
+            </a:r>
+            <a:r>
+              <a:rPr sz="1032">
+                <a:solidFill>
+                  <a:srgbClr val="262B36"/>
+                </a:solidFill>
+                <a:latin typeface="Consolas"/>
+                <a:ea typeface="Consolas"/>
+                <a:cs typeface="Consolas"/>
+              </a:rPr>
+              <a:t> </a:t>
+            </a:r>
+            <a:r>
+              <a:rPr sz="1032" b="1">
+                <a:solidFill>
+                  <a:srgbClr val="7442C8"/>
+                </a:solidFill>
+                <a:latin typeface="Consolas"/>
+                <a:ea typeface="Consolas"/>
+                <a:cs typeface="Consolas"/>
+              </a:rPr>
+              <a:t>GuardrailDecision</a:t>
+            </a:r>
+            <a:r>
+              <a:rPr sz="1032">
+                <a:solidFill>
+                  <a:srgbClr val="262B36"/>
+                </a:solidFill>
+                <a:latin typeface="Consolas"/>
+                <a:ea typeface="Consolas"/>
+                <a:cs typeface="Consolas"/>
+              </a:rPr>
+              <a:t> </a:t>
+            </a:r>
+            <a:r>
+              <a:rPr sz="1032" b="1">
+                <a:solidFill>
+                  <a:srgbClr val="7442C8"/>
+                </a:solidFill>
+                <a:latin typeface="Consolas"/>
+                <a:ea typeface="Consolas"/>
+                <a:cs typeface="Consolas"/>
+              </a:rPr>
+              <a:t>Evaluate</a:t>
+            </a:r>
+            <a:r>
+              <a:rPr sz="1032">
+                <a:solidFill>
                   <a:srgbClr val="5C6574"/>
                 </a:solidFill>
                 <a:latin typeface="Consolas"/>
                 <a:ea typeface="Consolas"/>
                 <a:cs typeface="Consolas"/>
               </a:rPr>
-              <a:t>{</a:t>
+              <a:t>(</a:t>
+            </a:r>
+            <a:r>
+              <a:rPr sz="1032" b="1">
+                <a:solidFill>
+                  <a:srgbClr val="7442C8"/>
+                </a:solidFill>
+                <a:latin typeface="Consolas"/>
+                <a:ea typeface="Consolas"/>
+                <a:cs typeface="Consolas"/>
+              </a:rPr>
+              <a:t>ToolInvocation</a:t>
+            </a:r>
+            <a:r>
+              <a:rPr sz="1032">
+                <a:solidFill>
+                  <a:srgbClr val="262B36"/>
+                </a:solidFill>
+                <a:latin typeface="Consolas"/>
+                <a:ea typeface="Consolas"/>
+                <a:cs typeface="Consolas"/>
+              </a:rPr>
+              <a:t> </a:t>
+            </a:r>
+            <a:r>
+              <a:rPr sz="1032">
+                <a:solidFill>
+                  <a:srgbClr val="262B36"/>
+                </a:solidFill>
+                <a:latin typeface="Consolas"/>
+                <a:ea typeface="Consolas"/>
+                <a:cs typeface="Consolas"/>
+              </a:rPr>
+              <a:t>invocation</a:t>
+            </a:r>
+            <a:r>
+              <a:rPr sz="1032">
+                <a:solidFill>
+                  <a:srgbClr val="5C6574"/>
+                </a:solidFill>
+                <a:latin typeface="Consolas"/>
+                <a:ea typeface="Consolas"/>
+                <a:cs typeface="Consolas"/>
+              </a:rPr>
+              <a:t>)</a:t>
             </a:r>
           </a:p>
           <a:p xmlns:a="http://schemas.openxmlformats.org/drawingml/2006/main">
@@ -23006,81 +23193,15 @@
               <a:t>  </a:t>
             </a:r>
             <a:r>
-              <a:rPr sz="1032" b="1">
-                <a:solidFill>
-                  <a:srgbClr val="005CC5"/>
-                </a:solidFill>
-                <a:latin typeface="Consolas"/>
-                <a:ea typeface="Consolas"/>
-                <a:cs typeface="Consolas"/>
-              </a:rPr>
-              <a:t>public</a:t>
-            </a:r>
-            <a:r>
               <a:rPr sz="1032">
                 <a:solidFill>
-                  <a:srgbClr val="262B36"/>
-                </a:solidFill>
-                <a:latin typeface="Consolas"/>
-                <a:ea typeface="Consolas"/>
-                <a:cs typeface="Consolas"/>
-              </a:rPr>
-              <a:t> </a:t>
-            </a:r>
-            <a:r>
-              <a:rPr sz="1032" b="1">
-                <a:solidFill>
-                  <a:srgbClr val="7442C8"/>
-                </a:solidFill>
-                <a:latin typeface="Consolas"/>
-                <a:ea typeface="Consolas"/>
-                <a:cs typeface="Consolas"/>
-              </a:rPr>
-              <a:t>GuardrailDecision</a:t>
-            </a:r>
-            <a:r>
-              <a:rPr sz="1032">
-                <a:solidFill>
-                  <a:srgbClr val="262B36"/>
-                </a:solidFill>
-                <a:latin typeface="Consolas"/>
-                <a:ea typeface="Consolas"/>
-                <a:cs typeface="Consolas"/>
-              </a:rPr>
-              <a:t> </a:t>
-            </a:r>
-            <a:r>
-              <a:rPr sz="1032" b="1">
-                <a:solidFill>
-                  <a:srgbClr val="7442C8"/>
-                </a:solidFill>
-                <a:latin typeface="Consolas"/>
-                <a:ea typeface="Consolas"/>
-                <a:cs typeface="Consolas"/>
-              </a:rPr>
-              <a:t>Evaluate</a:t>
-            </a:r>
-            <a:r>
-              <a:rPr sz="1032">
-                <a:solidFill>
                   <a:srgbClr val="5C6574"/>
                 </a:solidFill>
                 <a:latin typeface="Consolas"/>
                 <a:ea typeface="Consolas"/>
                 <a:cs typeface="Consolas"/>
               </a:rPr>
-              <a:t>(</a:t>
-            </a:r>
-            <a:r>
-              <a:rPr sz="1032" b="1">
-                <a:solidFill>
-                  <a:srgbClr val="7442C8"/>
-                </a:solidFill>
-                <a:latin typeface="Consolas"/>
-                <a:ea typeface="Consolas"/>
-                <a:cs typeface="Consolas"/>
-              </a:rPr>
-              <a:t>ToolInvocation</a:t>
+              <a:t>{</a:t>
             </a:r>
           </a:p>
           <a:p xmlns:a="http://schemas.openxmlformats.org/drawingml/2006/main">
@@ -23116,7 +23237,117 @@
                 <a:ea typeface="Consolas"/>
                 <a:cs typeface="Consolas"/>
               </a:rPr>
-              <a:t>      invocation</a:t>
+              <a:t>    </a:t>
+            </a:r>
+            <a:r>
+              <a:rPr sz="1032" b="1">
+                <a:solidFill>
+                  <a:srgbClr val="005CC5"/>
+                </a:solidFill>
+                <a:latin typeface="Consolas"/>
+                <a:ea typeface="Consolas"/>
+                <a:cs typeface="Consolas"/>
+              </a:rPr>
+              <a:t>foreach</a:t>
+            </a:r>
+            <a:r>
+              <a:rPr sz="1032">
+                <a:solidFill>
+                  <a:srgbClr val="262B36"/>
+                </a:solidFill>
+                <a:latin typeface="Consolas"/>
+                <a:ea typeface="Consolas"/>
+                <a:cs typeface="Consolas"/>
+              </a:rPr>
+              <a:t> </a:t>
+            </a:r>
+            <a:r>
+              <a:rPr sz="1032">
+                <a:solidFill>
+                  <a:srgbClr val="5C6574"/>
+                </a:solidFill>
+                <a:latin typeface="Consolas"/>
+                <a:ea typeface="Consolas"/>
+                <a:cs typeface="Consolas"/>
+              </a:rPr>
+              <a:t>(</a:t>
+            </a:r>
+            <a:r>
+              <a:rPr sz="1032" b="1">
+                <a:solidFill>
+                  <a:srgbClr val="005CC5"/>
+                </a:solidFill>
+                <a:latin typeface="Consolas"/>
+                <a:ea typeface="Consolas"/>
+                <a:cs typeface="Consolas"/>
+              </a:rPr>
+              <a:t>var</a:t>
+            </a:r>
+            <a:r>
+              <a:rPr sz="1032">
+                <a:solidFill>
+                  <a:srgbClr val="262B36"/>
+                </a:solidFill>
+                <a:latin typeface="Consolas"/>
+                <a:ea typeface="Consolas"/>
+                <a:cs typeface="Consolas"/>
+              </a:rPr>
+              <a:t> </a:t>
+            </a:r>
+            <a:r>
+              <a:rPr sz="1032">
+                <a:solidFill>
+                  <a:srgbClr val="262B36"/>
+                </a:solidFill>
+                <a:latin typeface="Consolas"/>
+                <a:ea typeface="Consolas"/>
+                <a:cs typeface="Consolas"/>
+              </a:rPr>
+              <a:t>guardrail</a:t>
+            </a:r>
+            <a:r>
+              <a:rPr sz="1032">
+                <a:solidFill>
+                  <a:srgbClr val="262B36"/>
+                </a:solidFill>
+                <a:latin typeface="Consolas"/>
+                <a:ea typeface="Consolas"/>
+                <a:cs typeface="Consolas"/>
+              </a:rPr>
+              <a:t> </a:t>
+            </a:r>
+            <a:r>
+              <a:rPr sz="1032" b="1">
+                <a:solidFill>
+                  <a:srgbClr val="005CC5"/>
+                </a:solidFill>
+                <a:latin typeface="Consolas"/>
+                <a:ea typeface="Consolas"/>
+                <a:cs typeface="Consolas"/>
+              </a:rPr>
+              <a:t>in</a:t>
+            </a:r>
+            <a:r>
+              <a:rPr sz="1032">
+                <a:solidFill>
+                  <a:srgbClr val="262B36"/>
+                </a:solidFill>
+                <a:latin typeface="Consolas"/>
+                <a:ea typeface="Consolas"/>
+                <a:cs typeface="Consolas"/>
+              </a:rPr>
+              <a:t> </a:t>
+            </a:r>
+            <a:r>
+              <a:rPr sz="1032">
+                <a:solidFill>
+                  <a:srgbClr val="262B36"/>
+                </a:solidFill>
+                <a:latin typeface="Consolas"/>
+                <a:ea typeface="Consolas"/>
+                <a:cs typeface="Consolas"/>
+              </a:rPr>
+              <a:t>guardrails</a:t>
             </a:r>
             <a:r>
               <a:rPr sz="1032">
@@ -23163,7 +23394,7 @@
                 <a:ea typeface="Consolas"/>
                 <a:cs typeface="Consolas"/>
               </a:rPr>
-              <a:t>  </a:t>
+              <a:t>    </a:t>
             </a:r>
             <a:r>
               <a:rPr sz="1032">
@@ -23210,7 +23441,7 @@
                 <a:ea typeface="Consolas"/>
                 <a:cs typeface="Consolas"/>
               </a:rPr>
-              <a:t>    </a:t>
+              <a:t>      </a:t>
             </a:r>
             <a:r>
               <a:rPr sz="1032" b="1">
@@ -23221,7 +23452,7 @@
                 <a:ea typeface="Consolas"/>
                 <a:cs typeface="Consolas"/>
               </a:rPr>
-              <a:t>foreach</a:t>
+              <a:t>var</a:t>
             </a:r>
             <a:r>
               <a:rPr sz="1032">
@@ -23237,26 +23468,92 @@
             <a:r>
               <a:rPr sz="1032">
                 <a:solidFill>
+                  <a:srgbClr val="262B36"/>
+                </a:solidFill>
+                <a:latin typeface="Consolas"/>
+                <a:ea typeface="Consolas"/>
+                <a:cs typeface="Consolas"/>
+              </a:rPr>
+              <a:t>decision</a:t>
+            </a:r>
+            <a:r>
+              <a:rPr sz="1032">
+                <a:solidFill>
+                  <a:srgbClr val="262B36"/>
+                </a:solidFill>
+                <a:latin typeface="Consolas"/>
+                <a:ea typeface="Consolas"/>
+                <a:cs typeface="Consolas"/>
+              </a:rPr>
+              <a:t> </a:t>
+            </a:r>
+            <a:r>
+              <a:rPr sz="1032">
+                <a:solidFill>
                   <a:srgbClr val="5C6574"/>
                 </a:solidFill>
                 <a:latin typeface="Consolas"/>
                 <a:ea typeface="Consolas"/>
                 <a:cs typeface="Consolas"/>
               </a:rPr>
+              <a:t>=</a:t>
+            </a:r>
+            <a:r>
+              <a:rPr sz="1032">
+                <a:solidFill>
+                  <a:srgbClr val="262B36"/>
+                </a:solidFill>
+                <a:latin typeface="Consolas"/>
+                <a:ea typeface="Consolas"/>
+                <a:cs typeface="Consolas"/>
+              </a:rPr>
+              <a:t> </a:t>
+            </a:r>
+            <a:r>
+              <a:rPr sz="1032">
+                <a:solidFill>
+                  <a:srgbClr val="262B36"/>
+                </a:solidFill>
+                <a:latin typeface="Consolas"/>
+                <a:ea typeface="Consolas"/>
+                <a:cs typeface="Consolas"/>
+              </a:rPr>
+              <a:t>guardrail</a:t>
+            </a:r>
+            <a:r>
+              <a:rPr sz="1032">
+                <a:solidFill>
+                  <a:srgbClr val="5C6574"/>
+                </a:solidFill>
+                <a:latin typeface="Consolas"/>
+                <a:ea typeface="Consolas"/>
+                <a:cs typeface="Consolas"/>
+              </a:rPr>
+              <a:t>.</a:t>
+            </a:r>
+            <a:r>
+              <a:rPr sz="1032" b="1">
+                <a:solidFill>
+                  <a:srgbClr val="7442C8"/>
+                </a:solidFill>
+                <a:latin typeface="Consolas"/>
+                <a:ea typeface="Consolas"/>
+                <a:cs typeface="Consolas"/>
+              </a:rPr>
+              <a:t>Evaluate</a:t>
+            </a:r>
+            <a:r>
+              <a:rPr sz="1032">
+                <a:solidFill>
+                  <a:srgbClr val="5C6574"/>
+                </a:solidFill>
+                <a:latin typeface="Consolas"/>
+                <a:ea typeface="Consolas"/>
+                <a:cs typeface="Consolas"/>
+              </a:rPr>
               <a:t>(</a:t>
             </a:r>
             <a:r>
-              <a:rPr sz="1032" b="1">
-                <a:solidFill>
-                  <a:srgbClr val="005CC5"/>
-                </a:solidFill>
-                <a:latin typeface="Consolas"/>
-                <a:ea typeface="Consolas"/>
-                <a:cs typeface="Consolas"/>
-              </a:rPr>
-              <a:t>var</a:t>
-            </a:r>
-            <a:r>
               <a:rPr sz="1032">
                 <a:solidFill>
                   <a:srgbClr val="262B36"/>
@@ -23265,7 +23562,7 @@
                 <a:ea typeface="Consolas"/>
                 <a:cs typeface="Consolas"/>
               </a:rPr>
-              <a:t> guardrail in guardrails</a:t>
+              <a:t>invocation</a:t>
             </a:r>
             <a:r>
               <a:rPr sz="1032">
@@ -23276,7 +23573,7 @@
                 <a:ea typeface="Consolas"/>
                 <a:cs typeface="Consolas"/>
               </a:rPr>
-              <a:t>)</a:t>
+              <a:t>);</a:t>
             </a:r>
           </a:p>
           <a:p xmlns:a="http://schemas.openxmlformats.org/drawingml/2006/main">
@@ -23356,7 +23653,7 @@
                 <a:ea typeface="Consolas"/>
                 <a:cs typeface="Consolas"/>
               </a:rPr>
-              <a:t>guardrail</a:t>
+              <a:t>decision</a:t>
             </a:r>
             <a:r>
               <a:rPr sz="1032">
@@ -23378,7 +23675,7 @@
                 <a:ea typeface="Consolas"/>
                 <a:cs typeface="Consolas"/>
               </a:rPr>
-              <a:t>Evaluate</a:t>
+              <a:t>Allowed</a:t>
             </a:r>
             <a:r>
               <a:rPr sz="1032">
@@ -23389,7 +23686,7 @@
                 <a:ea typeface="Consolas"/>
                 <a:cs typeface="Consolas"/>
               </a:rPr>
-              <a:t>(</a:t>
+              <a:t>)</a:t>
             </a:r>
             <a:r>
               <a:rPr sz="1032">
@@ -23400,62 +23697,51 @@
                 <a:ea typeface="Consolas"/>
                 <a:cs typeface="Consolas"/>
               </a:rPr>
-              <a:t>invocation</a:t>
+              <a:t> </a:t>
+            </a:r>
+            <a:r>
+              <a:rPr sz="1032" b="1">
+                <a:solidFill>
+                  <a:srgbClr val="005CC5"/>
+                </a:solidFill>
+                <a:latin typeface="Consolas"/>
+                <a:ea typeface="Consolas"/>
+                <a:cs typeface="Consolas"/>
+              </a:rPr>
+              <a:t>return</a:t>
             </a:r>
             <a:r>
               <a:rPr sz="1032">
                 <a:solidFill>
+                  <a:srgbClr val="262B36"/>
+                </a:solidFill>
+                <a:latin typeface="Consolas"/>
+                <a:ea typeface="Consolas"/>
+                <a:cs typeface="Consolas"/>
+              </a:rPr>
+              <a:t> </a:t>
+            </a:r>
+            <a:r>
+              <a:rPr sz="1032">
+                <a:solidFill>
+                  <a:srgbClr val="262B36"/>
+                </a:solidFill>
+                <a:latin typeface="Consolas"/>
+                <a:ea typeface="Consolas"/>
+                <a:cs typeface="Consolas"/>
+              </a:rPr>
+              <a:t>decision</a:t>
+            </a:r>
+            <a:r>
+              <a:rPr sz="1032">
+                <a:solidFill>
                   <a:srgbClr val="5C6574"/>
                 </a:solidFill>
                 <a:latin typeface="Consolas"/>
                 <a:ea typeface="Consolas"/>
                 <a:cs typeface="Consolas"/>
               </a:rPr>
-              <a:t>).</a:t>
-            </a:r>
-            <a:r>
-              <a:rPr sz="1032" b="1">
-                <a:solidFill>
-                  <a:srgbClr val="7442C8"/>
-                </a:solidFill>
-                <a:latin typeface="Consolas"/>
-                <a:ea typeface="Consolas"/>
-                <a:cs typeface="Consolas"/>
-              </a:rPr>
-              <a:t>Allowed</a:t>
-            </a:r>
-            <a:r>
-              <a:rPr sz="1032">
-                <a:solidFill>
-                  <a:srgbClr val="5C6574"/>
-                </a:solidFill>
-                <a:latin typeface="Consolas"/>
-                <a:ea typeface="Consolas"/>
-                <a:cs typeface="Consolas"/>
-              </a:rPr>
-              <a:t>)</a:t>
-            </a:r>
-            <a:r>
-              <a:rPr sz="1032">
-                <a:solidFill>
-                  <a:srgbClr val="262B36"/>
-                </a:solidFill>
-                <a:latin typeface="Consolas"/>
-                <a:ea typeface="Consolas"/>
-                <a:cs typeface="Consolas"/>
-              </a:rPr>
-              <a:t> </a:t>
-            </a:r>
-            <a:r>
-              <a:rPr sz="1032" b="1">
-                <a:solidFill>
-                  <a:srgbClr val="005CC5"/>
-                </a:solidFill>
-                <a:latin typeface="Consolas"/>
-                <a:ea typeface="Consolas"/>
-                <a:cs typeface="Consolas"/>
-              </a:rPr>
-              <a:t>return</a:t>
+              <a:t>;</a:t>
             </a:r>
           </a:p>
           <a:p xmlns:a="http://schemas.openxmlformats.org/drawingml/2006/main">
@@ -23491,7 +23777,7 @@
                 <a:ea typeface="Consolas"/>
                 <a:cs typeface="Consolas"/>
               </a:rPr>
-              <a:t>          decision</a:t>
+              <a:t>    </a:t>
             </a:r>
             <a:r>
               <a:rPr sz="1032">
@@ -23502,7 +23788,7 @@
                 <a:ea typeface="Consolas"/>
                 <a:cs typeface="Consolas"/>
               </a:rPr>
-              <a:t>;</a:t>
+              <a:t>}</a:t>
             </a:r>
           </a:p>
           <a:p xmlns:a="http://schemas.openxmlformats.org/drawingml/2006/main">
@@ -25837,6 +26123,28 @@
               </a:rPr>
               <a:t>:</a:t>
             </a:r>
+            <a:r>
+              <a:rPr sz="1049">
+                <a:solidFill>
+                  <a:srgbClr val="262B36"/>
+                </a:solidFill>
+                <a:latin typeface="Consolas"/>
+                <a:ea typeface="Consolas"/>
+                <a:cs typeface="Consolas"/>
+              </a:rPr>
+              <a:t> </a:t>
+            </a:r>
+            <a:r>
+              <a:rPr sz="1049" b="1">
+                <a:solidFill>
+                  <a:srgbClr val="7442C8"/>
+                </a:solidFill>
+                <a:latin typeface="Consolas"/>
+                <a:ea typeface="Consolas"/>
+                <a:cs typeface="Consolas"/>
+              </a:rPr>
+              <a:t>IToolGuardrail</a:t>
+            </a:r>
           </a:p>
           <a:p xmlns:a="http://schemas.openxmlformats.org/drawingml/2006/main">
             <a:pPr>
@@ -25865,24 +26173,13 @@
             <a:r>
               <a:rPr sz="1049">
                 <a:solidFill>
-                  <a:srgbClr val="262B36"/>
-                </a:solidFill>
-                <a:latin typeface="Consolas"/>
-                <a:ea typeface="Consolas"/>
-                <a:cs typeface="Consolas"/>
-              </a:rPr>
-              <a:t>    </a:t>
-            </a:r>
-            <a:r>
-              <a:rPr sz="1049" b="1">
-                <a:solidFill>
-                  <a:srgbClr val="7442C8"/>
-                </a:solidFill>
-                <a:latin typeface="Consolas"/>
-                <a:ea typeface="Consolas"/>
-                <a:cs typeface="Consolas"/>
-              </a:rPr>
-              <a:t>IToolGuardrail</a:t>
+                  <a:srgbClr val="5C6574"/>
+                </a:solidFill>
+                <a:latin typeface="Consolas"/>
+                <a:ea typeface="Consolas"/>
+                <a:cs typeface="Consolas"/>
+              </a:rPr>
+              <a:t>{</a:t>
             </a:r>
           </a:p>
           <a:p xmlns:a="http://schemas.openxmlformats.org/drawingml/2006/main">
@@ -25912,13 +26209,145 @@
             <a:r>
               <a:rPr sz="1049">
                 <a:solidFill>
+                  <a:srgbClr val="262B36"/>
+                </a:solidFill>
+                <a:latin typeface="Consolas"/>
+                <a:ea typeface="Consolas"/>
+                <a:cs typeface="Consolas"/>
+              </a:rPr>
+              <a:t>  </a:t>
+            </a:r>
+            <a:r>
+              <a:rPr sz="1049" b="1">
+                <a:solidFill>
+                  <a:srgbClr val="005CC5"/>
+                </a:solidFill>
+                <a:latin typeface="Consolas"/>
+                <a:ea typeface="Consolas"/>
+                <a:cs typeface="Consolas"/>
+              </a:rPr>
+              <a:t>private</a:t>
+            </a:r>
+            <a:r>
+              <a:rPr sz="1049">
+                <a:solidFill>
+                  <a:srgbClr val="262B36"/>
+                </a:solidFill>
+                <a:latin typeface="Consolas"/>
+                <a:ea typeface="Consolas"/>
+                <a:cs typeface="Consolas"/>
+              </a:rPr>
+              <a:t> </a:t>
+            </a:r>
+            <a:r>
+              <a:rPr sz="1049" b="1">
+                <a:solidFill>
+                  <a:srgbClr val="005CC5"/>
+                </a:solidFill>
+                <a:latin typeface="Consolas"/>
+                <a:ea typeface="Consolas"/>
+                <a:cs typeface="Consolas"/>
+              </a:rPr>
+              <a:t>static</a:t>
+            </a:r>
+            <a:r>
+              <a:rPr sz="1049">
+                <a:solidFill>
+                  <a:srgbClr val="262B36"/>
+                </a:solidFill>
+                <a:latin typeface="Consolas"/>
+                <a:ea typeface="Consolas"/>
+                <a:cs typeface="Consolas"/>
+              </a:rPr>
+              <a:t> </a:t>
+            </a:r>
+            <a:r>
+              <a:rPr sz="1049" b="1">
+                <a:solidFill>
+                  <a:srgbClr val="005CC5"/>
+                </a:solidFill>
+                <a:latin typeface="Consolas"/>
+                <a:ea typeface="Consolas"/>
+                <a:cs typeface="Consolas"/>
+              </a:rPr>
+              <a:t>readonly</a:t>
+            </a:r>
+            <a:r>
+              <a:rPr sz="1049">
+                <a:solidFill>
+                  <a:srgbClr val="262B36"/>
+                </a:solidFill>
+                <a:latin typeface="Consolas"/>
+                <a:ea typeface="Consolas"/>
+                <a:cs typeface="Consolas"/>
+              </a:rPr>
+              <a:t> </a:t>
+            </a:r>
+            <a:r>
+              <a:rPr sz="1049" b="1">
+                <a:solidFill>
+                  <a:srgbClr val="005CC5"/>
+                </a:solidFill>
+                <a:latin typeface="Consolas"/>
+                <a:ea typeface="Consolas"/>
+                <a:cs typeface="Consolas"/>
+              </a:rPr>
+              <a:t>string</a:t>
+            </a:r>
+            <a:r>
+              <a:rPr sz="1049">
+                <a:solidFill>
                   <a:srgbClr val="5C6574"/>
                 </a:solidFill>
                 <a:latin typeface="Consolas"/>
                 <a:ea typeface="Consolas"/>
                 <a:cs typeface="Consolas"/>
               </a:rPr>
-              <a:t>{</a:t>
+              <a:t>[]</a:t>
+            </a:r>
+            <a:r>
+              <a:rPr sz="1049">
+                <a:solidFill>
+                  <a:srgbClr val="262B36"/>
+                </a:solidFill>
+                <a:latin typeface="Consolas"/>
+                <a:ea typeface="Consolas"/>
+                <a:cs typeface="Consolas"/>
+              </a:rPr>
+              <a:t> </a:t>
+            </a:r>
+            <a:r>
+              <a:rPr sz="1049" b="1">
+                <a:solidFill>
+                  <a:srgbClr val="7442C8"/>
+                </a:solidFill>
+                <a:latin typeface="Consolas"/>
+                <a:ea typeface="Consolas"/>
+                <a:cs typeface="Consolas"/>
+              </a:rPr>
+              <a:t>ForbiddenNames</a:t>
+            </a:r>
+            <a:r>
+              <a:rPr sz="1049">
+                <a:solidFill>
+                  <a:srgbClr val="262B36"/>
+                </a:solidFill>
+                <a:latin typeface="Consolas"/>
+                <a:ea typeface="Consolas"/>
+                <a:cs typeface="Consolas"/>
+              </a:rPr>
+              <a:t> </a:t>
+            </a:r>
+            <a:r>
+              <a:rPr sz="1049">
+                <a:solidFill>
+                  <a:srgbClr val="5C6574"/>
+                </a:solidFill>
+                <a:latin typeface="Consolas"/>
+                <a:ea typeface="Consolas"/>
+                <a:cs typeface="Consolas"/>
+              </a:rPr>
+              <a:t>=</a:t>
             </a:r>
           </a:p>
           <a:p xmlns:a="http://schemas.openxmlformats.org/drawingml/2006/main">
@@ -25954,22 +26383,44 @@
                 <a:ea typeface="Consolas"/>
                 <a:cs typeface="Consolas"/>
               </a:rPr>
-              <a:t>  </a:t>
-            </a:r>
-            <a:r>
-              <a:rPr sz="1049" b="1">
-                <a:solidFill>
-                  <a:srgbClr val="005CC5"/>
-                </a:solidFill>
-                <a:latin typeface="Consolas"/>
-                <a:ea typeface="Consolas"/>
-                <a:cs typeface="Consolas"/>
-              </a:rPr>
-              <a:t>private</a:t>
+              <a:t>    </a:t>
             </a:r>
             <a:r>
               <a:rPr sz="1049">
                 <a:solidFill>
+                  <a:srgbClr val="5C6574"/>
+                </a:solidFill>
+                <a:latin typeface="Consolas"/>
+                <a:ea typeface="Consolas"/>
+                <a:cs typeface="Consolas"/>
+              </a:rPr>
+              <a:t>[</a:t>
+            </a:r>
+            <a:r>
+              <a:rPr sz="1049">
+                <a:solidFill>
+                  <a:srgbClr val="A95921"/>
+                </a:solidFill>
+                <a:latin typeface="Consolas"/>
+                <a:ea typeface="Consolas"/>
+                <a:cs typeface="Consolas"/>
+              </a:rPr>
+              <a:t>".env"</a:t>
+            </a:r>
+            <a:r>
+              <a:rPr sz="1049">
+                <a:solidFill>
+                  <a:srgbClr val="5C6574"/>
+                </a:solidFill>
+                <a:latin typeface="Consolas"/>
+                <a:ea typeface="Consolas"/>
+                <a:cs typeface="Consolas"/>
+              </a:rPr>
+              <a:t>,</a:t>
+            </a:r>
+            <a:r>
+              <a:rPr sz="1049">
+                <a:solidFill>
                   <a:srgbClr val="262B36"/>
                 </a:solidFill>
                 <a:latin typeface="Consolas"/>
@@ -25979,19 +26430,30 @@
               <a:t> </a:t>
             </a:r>
             <a:r>
-              <a:rPr sz="1049" b="1">
-                <a:solidFill>
-                  <a:srgbClr val="005CC5"/>
-                </a:solidFill>
-                <a:latin typeface="Consolas"/>
-                <a:ea typeface="Consolas"/>
-                <a:cs typeface="Consolas"/>
-              </a:rPr>
-              <a:t>static</a:t>
-            </a:r>
-            <a:r>
               <a:rPr sz="1049">
                 <a:solidFill>
+                  <a:srgbClr val="A95921"/>
+                </a:solidFill>
+                <a:latin typeface="Consolas"/>
+                <a:ea typeface="Consolas"/>
+                <a:cs typeface="Consolas"/>
+              </a:rPr>
+              <a:t>"secrets.json"</a:t>
+            </a:r>
+            <a:r>
+              <a:rPr sz="1049">
+                <a:solidFill>
+                  <a:srgbClr val="5C6574"/>
+                </a:solidFill>
+                <a:latin typeface="Consolas"/>
+                <a:ea typeface="Consolas"/>
+                <a:cs typeface="Consolas"/>
+              </a:rPr>
+              <a:t>,</a:t>
+            </a:r>
+            <a:r>
+              <a:rPr sz="1049">
+                <a:solidFill>
                   <a:srgbClr val="262B36"/>
                 </a:solidFill>
                 <a:latin typeface="Consolas"/>
@@ -26001,37 +26463,15 @@
               <a:t> </a:t>
             </a:r>
             <a:r>
-              <a:rPr sz="1049" b="1">
-                <a:solidFill>
-                  <a:srgbClr val="005CC5"/>
-                </a:solidFill>
-                <a:latin typeface="Consolas"/>
-                <a:ea typeface="Consolas"/>
-                <a:cs typeface="Consolas"/>
-              </a:rPr>
-              <a:t>readonly</a:t>
-            </a:r>
-            <a:r>
               <a:rPr sz="1049">
                 <a:solidFill>
-                  <a:srgbClr val="262B36"/>
-                </a:solidFill>
-                <a:latin typeface="Consolas"/>
-                <a:ea typeface="Consolas"/>
-                <a:cs typeface="Consolas"/>
-              </a:rPr>
-              <a:t> </a:t>
-            </a:r>
-            <a:r>
-              <a:rPr sz="1049" b="1">
-                <a:solidFill>
-                  <a:srgbClr val="005CC5"/>
-                </a:solidFill>
-                <a:latin typeface="Consolas"/>
-                <a:ea typeface="Consolas"/>
-                <a:cs typeface="Consolas"/>
-              </a:rPr>
-              <a:t>string</a:t>
+                  <a:srgbClr val="A95921"/>
+                </a:solidFill>
+                <a:latin typeface="Consolas"/>
+                <a:ea typeface="Consolas"/>
+                <a:cs typeface="Consolas"/>
+              </a:rPr>
+              <a:t>"appsettings.secrets.json"</a:t>
             </a:r>
             <a:r>
               <a:rPr sz="1049">
@@ -26042,51 +26482,7 @@
                 <a:ea typeface="Consolas"/>
                 <a:cs typeface="Consolas"/>
               </a:rPr>
-              <a:t>[]</a:t>
-            </a:r>
-            <a:r>
-              <a:rPr sz="1049">
-                <a:solidFill>
-                  <a:srgbClr val="262B36"/>
-                </a:solidFill>
-                <a:latin typeface="Consolas"/>
-                <a:ea typeface="Consolas"/>
-                <a:cs typeface="Consolas"/>
-              </a:rPr>
-              <a:t> </a:t>
-            </a:r>
-            <a:r>
-              <a:rPr sz="1049" b="1">
-                <a:solidFill>
-                  <a:srgbClr val="7442C8"/>
-                </a:solidFill>
-                <a:latin typeface="Consolas"/>
-                <a:ea typeface="Consolas"/>
-                <a:cs typeface="Consolas"/>
-              </a:rPr>
-              <a:t>ForbiddenNames</a:t>
-            </a:r>
-            <a:r>
-              <a:rPr sz="1049">
-                <a:solidFill>
-                  <a:srgbClr val="262B36"/>
-                </a:solidFill>
-                <a:latin typeface="Consolas"/>
-                <a:ea typeface="Consolas"/>
-                <a:cs typeface="Consolas"/>
-              </a:rPr>
-              <a:t> </a:t>
-            </a:r>
-            <a:r>
-              <a:rPr sz="1049">
-                <a:solidFill>
-                  <a:srgbClr val="5C6574"/>
-                </a:solidFill>
-                <a:latin typeface="Consolas"/>
-                <a:ea typeface="Consolas"/>
-                <a:cs typeface="Consolas"/>
-              </a:rPr>
-              <a:t>=</a:t>
+              <a:t>];</a:t>
             </a:r>
           </a:p>
           <a:p xmlns:a="http://schemas.openxmlformats.org/drawingml/2006/main">
@@ -26113,116 +26509,6 @@
               </a:rPr>
               <a:t> 5  </a:t>
             </a:r>
-            <a:r>
-              <a:rPr sz="1049">
-                <a:solidFill>
-                  <a:srgbClr val="262B36"/>
-                </a:solidFill>
-                <a:latin typeface="Consolas"/>
-                <a:ea typeface="Consolas"/>
-                <a:cs typeface="Consolas"/>
-              </a:rPr>
-              <a:t>    </a:t>
-            </a:r>
-            <a:r>
-              <a:rPr sz="1049">
-                <a:solidFill>
-                  <a:srgbClr val="5C6574"/>
-                </a:solidFill>
-                <a:latin typeface="Consolas"/>
-                <a:ea typeface="Consolas"/>
-                <a:cs typeface="Consolas"/>
-              </a:rPr>
-              <a:t>[</a:t>
-            </a:r>
-            <a:r>
-              <a:rPr sz="1049">
-                <a:solidFill>
-                  <a:srgbClr val="A95921"/>
-                </a:solidFill>
-                <a:latin typeface="Consolas"/>
-                <a:ea typeface="Consolas"/>
-                <a:cs typeface="Consolas"/>
-              </a:rPr>
-              <a:t>".env"</a:t>
-            </a:r>
-            <a:r>
-              <a:rPr sz="1049">
-                <a:solidFill>
-                  <a:srgbClr val="5C6574"/>
-                </a:solidFill>
-                <a:latin typeface="Consolas"/>
-                <a:ea typeface="Consolas"/>
-                <a:cs typeface="Consolas"/>
-              </a:rPr>
-              <a:t>,</a:t>
-            </a:r>
-            <a:r>
-              <a:rPr sz="1049">
-                <a:solidFill>
-                  <a:srgbClr val="262B36"/>
-                </a:solidFill>
-                <a:latin typeface="Consolas"/>
-                <a:ea typeface="Consolas"/>
-                <a:cs typeface="Consolas"/>
-              </a:rPr>
-              <a:t> </a:t>
-            </a:r>
-            <a:r>
-              <a:rPr sz="1049">
-                <a:solidFill>
-                  <a:srgbClr val="A95921"/>
-                </a:solidFill>
-                <a:latin typeface="Consolas"/>
-                <a:ea typeface="Consolas"/>
-                <a:cs typeface="Consolas"/>
-              </a:rPr>
-              <a:t>"secrets.json"</a:t>
-            </a:r>
-            <a:r>
-              <a:rPr sz="1049">
-                <a:solidFill>
-                  <a:srgbClr val="5C6574"/>
-                </a:solidFill>
-                <a:latin typeface="Consolas"/>
-                <a:ea typeface="Consolas"/>
-                <a:cs typeface="Consolas"/>
-              </a:rPr>
-              <a:t>,</a:t>
-            </a:r>
-            <a:r>
-              <a:rPr sz="1049">
-                <a:solidFill>
-                  <a:srgbClr val="262B36"/>
-                </a:solidFill>
-                <a:latin typeface="Consolas"/>
-                <a:ea typeface="Consolas"/>
-                <a:cs typeface="Consolas"/>
-              </a:rPr>
-              <a:t> </a:t>
-            </a:r>
-            <a:r>
-              <a:rPr sz="1049">
-                <a:solidFill>
-                  <a:srgbClr val="A95921"/>
-                </a:solidFill>
-                <a:latin typeface="Consolas"/>
-                <a:ea typeface="Consolas"/>
-                <a:cs typeface="Consolas"/>
-              </a:rPr>
-              <a:t>"appsettings.secrets.json"</a:t>
-            </a:r>
-            <a:r>
-              <a:rPr sz="1049">
-                <a:solidFill>
-                  <a:srgbClr val="5C6574"/>
-                </a:solidFill>
-                <a:latin typeface="Consolas"/>
-                <a:ea typeface="Consolas"/>
-                <a:cs typeface="Consolas"/>
-              </a:rPr>
-              <a:t>];</a:t>
-            </a:r>
           </a:p>
           <a:p xmlns:a="http://schemas.openxmlformats.org/drawingml/2006/main">
             <a:pPr>
@@ -26248,6 +26534,127 @@
               </a:rPr>
               <a:t> 6  </a:t>
             </a:r>
+            <a:r>
+              <a:rPr sz="1049">
+                <a:solidFill>
+                  <a:srgbClr val="262B36"/>
+                </a:solidFill>
+                <a:latin typeface="Consolas"/>
+                <a:ea typeface="Consolas"/>
+                <a:cs typeface="Consolas"/>
+              </a:rPr>
+              <a:t>  </a:t>
+            </a:r>
+            <a:r>
+              <a:rPr sz="1049" b="1">
+                <a:solidFill>
+                  <a:srgbClr val="005CC5"/>
+                </a:solidFill>
+                <a:latin typeface="Consolas"/>
+                <a:ea typeface="Consolas"/>
+                <a:cs typeface="Consolas"/>
+              </a:rPr>
+              <a:t>public</a:t>
+            </a:r>
+            <a:r>
+              <a:rPr sz="1049">
+                <a:solidFill>
+                  <a:srgbClr val="262B36"/>
+                </a:solidFill>
+                <a:latin typeface="Consolas"/>
+                <a:ea typeface="Consolas"/>
+                <a:cs typeface="Consolas"/>
+              </a:rPr>
+              <a:t> </a:t>
+            </a:r>
+            <a:r>
+              <a:rPr sz="1049" b="1">
+                <a:solidFill>
+                  <a:srgbClr val="7442C8"/>
+                </a:solidFill>
+                <a:latin typeface="Consolas"/>
+                <a:ea typeface="Consolas"/>
+                <a:cs typeface="Consolas"/>
+              </a:rPr>
+              <a:t>GuardrailDecision</a:t>
+            </a:r>
+            <a:r>
+              <a:rPr sz="1049">
+                <a:solidFill>
+                  <a:srgbClr val="262B36"/>
+                </a:solidFill>
+                <a:latin typeface="Consolas"/>
+                <a:ea typeface="Consolas"/>
+                <a:cs typeface="Consolas"/>
+              </a:rPr>
+              <a:t> </a:t>
+            </a:r>
+            <a:r>
+              <a:rPr sz="1049" b="1">
+                <a:solidFill>
+                  <a:srgbClr val="7442C8"/>
+                </a:solidFill>
+                <a:latin typeface="Consolas"/>
+                <a:ea typeface="Consolas"/>
+                <a:cs typeface="Consolas"/>
+              </a:rPr>
+              <a:t>Evaluate</a:t>
+            </a:r>
+            <a:r>
+              <a:rPr sz="1049">
+                <a:solidFill>
+                  <a:srgbClr val="5C6574"/>
+                </a:solidFill>
+                <a:latin typeface="Consolas"/>
+                <a:ea typeface="Consolas"/>
+                <a:cs typeface="Consolas"/>
+              </a:rPr>
+              <a:t>(</a:t>
+            </a:r>
+            <a:r>
+              <a:rPr sz="1049" b="1">
+                <a:solidFill>
+                  <a:srgbClr val="7442C8"/>
+                </a:solidFill>
+                <a:latin typeface="Consolas"/>
+                <a:ea typeface="Consolas"/>
+                <a:cs typeface="Consolas"/>
+              </a:rPr>
+              <a:t>ToolInvocation</a:t>
+            </a:r>
+            <a:r>
+              <a:rPr sz="1049">
+                <a:solidFill>
+                  <a:srgbClr val="262B36"/>
+                </a:solidFill>
+                <a:latin typeface="Consolas"/>
+                <a:ea typeface="Consolas"/>
+                <a:cs typeface="Consolas"/>
+              </a:rPr>
+              <a:t> </a:t>
+            </a:r>
+            <a:r>
+              <a:rPr sz="1049">
+                <a:solidFill>
+                  <a:srgbClr val="262B36"/>
+                </a:solidFill>
+                <a:latin typeface="Consolas"/>
+                <a:ea typeface="Consolas"/>
+                <a:cs typeface="Consolas"/>
+              </a:rPr>
+              <a:t>invocation</a:t>
+            </a:r>
+            <a:r>
+              <a:rPr sz="1049">
+                <a:solidFill>
+                  <a:srgbClr val="5C6574"/>
+                </a:solidFill>
+                <a:latin typeface="Consolas"/>
+                <a:ea typeface="Consolas"/>
+                <a:cs typeface="Consolas"/>
+              </a:rPr>
+              <a:t>)</a:t>
+            </a:r>
           </a:p>
           <a:p xmlns:a="http://schemas.openxmlformats.org/drawingml/2006/main">
             <a:pPr>
@@ -26285,81 +26692,15 @@
               <a:t>  </a:t>
             </a:r>
             <a:r>
-              <a:rPr sz="1049" b="1">
-                <a:solidFill>
-                  <a:srgbClr val="005CC5"/>
-                </a:solidFill>
-                <a:latin typeface="Consolas"/>
-                <a:ea typeface="Consolas"/>
-                <a:cs typeface="Consolas"/>
-              </a:rPr>
-              <a:t>public</a:t>
-            </a:r>
-            <a:r>
               <a:rPr sz="1049">
                 <a:solidFill>
-                  <a:srgbClr val="262B36"/>
-                </a:solidFill>
-                <a:latin typeface="Consolas"/>
-                <a:ea typeface="Consolas"/>
-                <a:cs typeface="Consolas"/>
-              </a:rPr>
-              <a:t> </a:t>
-            </a:r>
-            <a:r>
-              <a:rPr sz="1049" b="1">
-                <a:solidFill>
-                  <a:srgbClr val="7442C8"/>
-                </a:solidFill>
-                <a:latin typeface="Consolas"/>
-                <a:ea typeface="Consolas"/>
-                <a:cs typeface="Consolas"/>
-              </a:rPr>
-              <a:t>GuardrailDecision</a:t>
-            </a:r>
-            <a:r>
-              <a:rPr sz="1049">
-                <a:solidFill>
-                  <a:srgbClr val="262B36"/>
-                </a:solidFill>
-                <a:latin typeface="Consolas"/>
-                <a:ea typeface="Consolas"/>
-                <a:cs typeface="Consolas"/>
-              </a:rPr>
-              <a:t> </a:t>
-            </a:r>
-            <a:r>
-              <a:rPr sz="1049" b="1">
-                <a:solidFill>
-                  <a:srgbClr val="7442C8"/>
-                </a:solidFill>
-                <a:latin typeface="Consolas"/>
-                <a:ea typeface="Consolas"/>
-                <a:cs typeface="Consolas"/>
-              </a:rPr>
-              <a:t>Evaluate</a:t>
-            </a:r>
-            <a:r>
-              <a:rPr sz="1049">
-                <a:solidFill>
                   <a:srgbClr val="5C6574"/>
                 </a:solidFill>
                 <a:latin typeface="Consolas"/>
                 <a:ea typeface="Consolas"/>
                 <a:cs typeface="Consolas"/>
               </a:rPr>
-              <a:t>(</a:t>
-            </a:r>
-            <a:r>
-              <a:rPr sz="1049" b="1">
-                <a:solidFill>
-                  <a:srgbClr val="7442C8"/>
-                </a:solidFill>
-                <a:latin typeface="Consolas"/>
-                <a:ea typeface="Consolas"/>
-                <a:cs typeface="Consolas"/>
-              </a:rPr>
-              <a:t>ToolInvocation</a:t>
+              <a:t>{</a:t>
             </a:r>
           </a:p>
           <a:p xmlns:a="http://schemas.openxmlformats.org/drawingml/2006/main">
@@ -26395,18 +26736,128 @@
                 <a:ea typeface="Consolas"/>
                 <a:cs typeface="Consolas"/>
               </a:rPr>
-              <a:t>      invocation</a:t>
+              <a:t>    </a:t>
+            </a:r>
+            <a:r>
+              <a:rPr sz="1049" b="1">
+                <a:solidFill>
+                  <a:srgbClr val="005CC5"/>
+                </a:solidFill>
+                <a:latin typeface="Consolas"/>
+                <a:ea typeface="Consolas"/>
+                <a:cs typeface="Consolas"/>
+              </a:rPr>
+              <a:t>if</a:t>
             </a:r>
             <a:r>
               <a:rPr sz="1049">
                 <a:solidFill>
+                  <a:srgbClr val="262B36"/>
+                </a:solidFill>
+                <a:latin typeface="Consolas"/>
+                <a:ea typeface="Consolas"/>
+                <a:cs typeface="Consolas"/>
+              </a:rPr>
+              <a:t> </a:t>
+            </a:r>
+            <a:r>
+              <a:rPr sz="1049">
+                <a:solidFill>
                   <a:srgbClr val="5C6574"/>
                 </a:solidFill>
                 <a:latin typeface="Consolas"/>
                 <a:ea typeface="Consolas"/>
                 <a:cs typeface="Consolas"/>
               </a:rPr>
-              <a:t>)</a:t>
+              <a:t>(</a:t>
+            </a:r>
+            <a:r>
+              <a:rPr sz="1049" b="1">
+                <a:solidFill>
+                  <a:srgbClr val="005CC5"/>
+                </a:solidFill>
+                <a:latin typeface="Consolas"/>
+                <a:ea typeface="Consolas"/>
+                <a:cs typeface="Consolas"/>
+              </a:rPr>
+              <a:t>string</a:t>
+            </a:r>
+            <a:r>
+              <a:rPr sz="1049">
+                <a:solidFill>
+                  <a:srgbClr val="5C6574"/>
+                </a:solidFill>
+                <a:latin typeface="Consolas"/>
+                <a:ea typeface="Consolas"/>
+                <a:cs typeface="Consolas"/>
+              </a:rPr>
+              <a:t>.</a:t>
+            </a:r>
+            <a:r>
+              <a:rPr sz="1049" b="1">
+                <a:solidFill>
+                  <a:srgbClr val="7442C8"/>
+                </a:solidFill>
+                <a:latin typeface="Consolas"/>
+                <a:ea typeface="Consolas"/>
+                <a:cs typeface="Consolas"/>
+              </a:rPr>
+              <a:t>IsNullOrWhiteSpace</a:t>
+            </a:r>
+            <a:r>
+              <a:rPr sz="1049">
+                <a:solidFill>
+                  <a:srgbClr val="5C6574"/>
+                </a:solidFill>
+                <a:latin typeface="Consolas"/>
+                <a:ea typeface="Consolas"/>
+                <a:cs typeface="Consolas"/>
+              </a:rPr>
+              <a:t>(</a:t>
+            </a:r>
+            <a:r>
+              <a:rPr sz="1049">
+                <a:solidFill>
+                  <a:srgbClr val="262B36"/>
+                </a:solidFill>
+                <a:latin typeface="Consolas"/>
+                <a:ea typeface="Consolas"/>
+                <a:cs typeface="Consolas"/>
+              </a:rPr>
+              <a:t>invocation</a:t>
+            </a:r>
+            <a:r>
+              <a:rPr sz="1049">
+                <a:solidFill>
+                  <a:srgbClr val="5C6574"/>
+                </a:solidFill>
+                <a:latin typeface="Consolas"/>
+                <a:ea typeface="Consolas"/>
+                <a:cs typeface="Consolas"/>
+              </a:rPr>
+              <a:t>.</a:t>
+            </a:r>
+            <a:r>
+              <a:rPr sz="1049" b="1">
+                <a:solidFill>
+                  <a:srgbClr val="7442C8"/>
+                </a:solidFill>
+                <a:latin typeface="Consolas"/>
+                <a:ea typeface="Consolas"/>
+                <a:cs typeface="Consolas"/>
+              </a:rPr>
+              <a:t>FilePath</a:t>
+            </a:r>
+            <a:r>
+              <a:rPr sz="1049">
+                <a:solidFill>
+                  <a:srgbClr val="5C6574"/>
+                </a:solidFill>
+                <a:latin typeface="Consolas"/>
+                <a:ea typeface="Consolas"/>
+                <a:cs typeface="Consolas"/>
+              </a:rPr>
+              <a:t>))</a:t>
             </a:r>
           </a:p>
           <a:p xmlns:a="http://schemas.openxmlformats.org/drawingml/2006/main">
@@ -26442,18 +26893,73 @@
                 <a:ea typeface="Consolas"/>
                 <a:cs typeface="Consolas"/>
               </a:rPr>
-              <a:t>  </a:t>
+              <a:t>      </a:t>
+            </a:r>
+            <a:r>
+              <a:rPr sz="1049" b="1">
+                <a:solidFill>
+                  <a:srgbClr val="005CC5"/>
+                </a:solidFill>
+                <a:latin typeface="Consolas"/>
+                <a:ea typeface="Consolas"/>
+                <a:cs typeface="Consolas"/>
+              </a:rPr>
+              <a:t>return</a:t>
             </a:r>
             <a:r>
               <a:rPr sz="1049">
                 <a:solidFill>
+                  <a:srgbClr val="262B36"/>
+                </a:solidFill>
+                <a:latin typeface="Consolas"/>
+                <a:ea typeface="Consolas"/>
+                <a:cs typeface="Consolas"/>
+              </a:rPr>
+              <a:t> </a:t>
+            </a:r>
+            <a:r>
+              <a:rPr sz="1049" b="1">
+                <a:solidFill>
+                  <a:srgbClr val="7442C8"/>
+                </a:solidFill>
+                <a:latin typeface="Consolas"/>
+                <a:ea typeface="Consolas"/>
+                <a:cs typeface="Consolas"/>
+              </a:rPr>
+              <a:t>GuardrailDecision</a:t>
+            </a:r>
+            <a:r>
+              <a:rPr sz="1049">
+                <a:solidFill>
                   <a:srgbClr val="5C6574"/>
                 </a:solidFill>
                 <a:latin typeface="Consolas"/>
                 <a:ea typeface="Consolas"/>
                 <a:cs typeface="Consolas"/>
               </a:rPr>
-              <a:t>{</a:t>
+              <a:t>.</a:t>
+            </a:r>
+            <a:r>
+              <a:rPr sz="1049" b="1">
+                <a:solidFill>
+                  <a:srgbClr val="7442C8"/>
+                </a:solidFill>
+                <a:latin typeface="Consolas"/>
+                <a:ea typeface="Consolas"/>
+                <a:cs typeface="Consolas"/>
+              </a:rPr>
+              <a:t>Allow</a:t>
+            </a:r>
+            <a:r>
+              <a:rPr sz="1049">
+                <a:solidFill>
+                  <a:srgbClr val="5C6574"/>
+                </a:solidFill>
+                <a:latin typeface="Consolas"/>
+                <a:ea typeface="Consolas"/>
+                <a:cs typeface="Consolas"/>
+              </a:rPr>
+              <a:t>();</a:t>
             </a:r>
           </a:p>
           <a:p xmlns:a="http://schemas.openxmlformats.org/drawingml/2006/main">
@@ -26480,138 +26986,6 @@
               </a:rPr>
               <a:t>10  </a:t>
             </a:r>
-            <a:r>
-              <a:rPr sz="1049">
-                <a:solidFill>
-                  <a:srgbClr val="262B36"/>
-                </a:solidFill>
-                <a:latin typeface="Consolas"/>
-                <a:ea typeface="Consolas"/>
-                <a:cs typeface="Consolas"/>
-              </a:rPr>
-              <a:t>    </a:t>
-            </a:r>
-            <a:r>
-              <a:rPr sz="1049" b="1">
-                <a:solidFill>
-                  <a:srgbClr val="005CC5"/>
-                </a:solidFill>
-                <a:latin typeface="Consolas"/>
-                <a:ea typeface="Consolas"/>
-                <a:cs typeface="Consolas"/>
-              </a:rPr>
-              <a:t>var</a:t>
-            </a:r>
-            <a:r>
-              <a:rPr sz="1049">
-                <a:solidFill>
-                  <a:srgbClr val="262B36"/>
-                </a:solidFill>
-                <a:latin typeface="Consolas"/>
-                <a:ea typeface="Consolas"/>
-                <a:cs typeface="Consolas"/>
-              </a:rPr>
-              <a:t> normalized </a:t>
-            </a:r>
-            <a:r>
-              <a:rPr sz="1049">
-                <a:solidFill>
-                  <a:srgbClr val="5C6574"/>
-                </a:solidFill>
-                <a:latin typeface="Consolas"/>
-                <a:ea typeface="Consolas"/>
-                <a:cs typeface="Consolas"/>
-              </a:rPr>
-              <a:t>=</a:t>
-            </a:r>
-            <a:r>
-              <a:rPr sz="1049">
-                <a:solidFill>
-                  <a:srgbClr val="262B36"/>
-                </a:solidFill>
-                <a:latin typeface="Consolas"/>
-                <a:ea typeface="Consolas"/>
-                <a:cs typeface="Consolas"/>
-              </a:rPr>
-              <a:t> invocation</a:t>
-            </a:r>
-            <a:r>
-              <a:rPr sz="1049">
-                <a:solidFill>
-                  <a:srgbClr val="5C6574"/>
-                </a:solidFill>
-                <a:latin typeface="Consolas"/>
-                <a:ea typeface="Consolas"/>
-                <a:cs typeface="Consolas"/>
-              </a:rPr>
-              <a:t>.</a:t>
-            </a:r>
-            <a:r>
-              <a:rPr sz="1049" b="1">
-                <a:solidFill>
-                  <a:srgbClr val="7442C8"/>
-                </a:solidFill>
-                <a:latin typeface="Consolas"/>
-                <a:ea typeface="Consolas"/>
-                <a:cs typeface="Consolas"/>
-              </a:rPr>
-              <a:t>FilePath</a:t>
-            </a:r>
-            <a:r>
-              <a:rPr sz="1049">
-                <a:solidFill>
-                  <a:srgbClr val="5C6574"/>
-                </a:solidFill>
-                <a:latin typeface="Consolas"/>
-                <a:ea typeface="Consolas"/>
-                <a:cs typeface="Consolas"/>
-              </a:rPr>
-              <a:t>?.</a:t>
-            </a:r>
-            <a:r>
-              <a:rPr sz="1049" b="1">
-                <a:solidFill>
-                  <a:srgbClr val="7442C8"/>
-                </a:solidFill>
-                <a:latin typeface="Consolas"/>
-                <a:ea typeface="Consolas"/>
-                <a:cs typeface="Consolas"/>
-              </a:rPr>
-              <a:t>Replace</a:t>
-            </a:r>
-            <a:r>
-              <a:rPr sz="1049">
-                <a:solidFill>
-                  <a:srgbClr val="5C6574"/>
-                </a:solidFill>
-                <a:latin typeface="Consolas"/>
-                <a:ea typeface="Consolas"/>
-                <a:cs typeface="Consolas"/>
-              </a:rPr>
-              <a:t>(</a:t>
-            </a:r>
-            <a:r>
-              <a:rPr sz="1049">
-                <a:solidFill>
-                  <a:srgbClr val="A95921"/>
-                </a:solidFill>
-                <a:latin typeface="Consolas"/>
-                <a:ea typeface="Consolas"/>
-                <a:cs typeface="Consolas"/>
-              </a:rPr>
-              <a:t>"\\"</a:t>
-            </a:r>
-            <a:r>
-              <a:rPr sz="1049">
-                <a:solidFill>
-                  <a:srgbClr val="5C6574"/>
-                </a:solidFill>
-                <a:latin typeface="Consolas"/>
-                <a:ea typeface="Consolas"/>
-                <a:cs typeface="Consolas"/>
-              </a:rPr>
-              <a:t>,</a:t>
-            </a:r>
           </a:p>
           <a:p xmlns:a="http://schemas.openxmlformats.org/drawingml/2006/main">
             <a:pPr>
@@ -26646,18 +27020,40 @@
                 <a:ea typeface="Consolas"/>
                 <a:cs typeface="Consolas"/>
               </a:rPr>
-              <a:t>        </a:t>
+              <a:t>    </a:t>
+            </a:r>
+            <a:r>
+              <a:rPr sz="1049" b="1">
+                <a:solidFill>
+                  <a:srgbClr val="005CC5"/>
+                </a:solidFill>
+                <a:latin typeface="Consolas"/>
+                <a:ea typeface="Consolas"/>
+                <a:cs typeface="Consolas"/>
+              </a:rPr>
+              <a:t>return</a:t>
             </a:r>
             <a:r>
               <a:rPr sz="1049">
                 <a:solidFill>
-                  <a:srgbClr val="A95921"/>
-                </a:solidFill>
-                <a:latin typeface="Consolas"/>
-                <a:ea typeface="Consolas"/>
-                <a:cs typeface="Consolas"/>
-              </a:rPr>
-              <a:t>"/"</a:t>
+                  <a:srgbClr val="262B36"/>
+                </a:solidFill>
+                <a:latin typeface="Consolas"/>
+                <a:ea typeface="Consolas"/>
+                <a:cs typeface="Consolas"/>
+              </a:rPr>
+              <a:t> </a:t>
+            </a:r>
+            <a:r>
+              <a:rPr sz="1049" b="1">
+                <a:solidFill>
+                  <a:srgbClr val="7442C8"/>
+                </a:solidFill>
+                <a:latin typeface="Consolas"/>
+                <a:ea typeface="Consolas"/>
+                <a:cs typeface="Consolas"/>
+              </a:rPr>
+              <a:t>IsSensitive</a:t>
             </a:r>
             <a:r>
               <a:rPr sz="1049">
@@ -26668,7 +27064,73 @@
                 <a:ea typeface="Consolas"/>
                 <a:cs typeface="Consolas"/>
               </a:rPr>
-              <a:t>);</a:t>
+              <a:t>(</a:t>
+            </a:r>
+            <a:r>
+              <a:rPr sz="1049" b="1">
+                <a:solidFill>
+                  <a:srgbClr val="7442C8"/>
+                </a:solidFill>
+                <a:latin typeface="Consolas"/>
+                <a:ea typeface="Consolas"/>
+                <a:cs typeface="Consolas"/>
+              </a:rPr>
+              <a:t>FileNameOf</a:t>
+            </a:r>
+            <a:r>
+              <a:rPr sz="1049">
+                <a:solidFill>
+                  <a:srgbClr val="5C6574"/>
+                </a:solidFill>
+                <a:latin typeface="Consolas"/>
+                <a:ea typeface="Consolas"/>
+                <a:cs typeface="Consolas"/>
+              </a:rPr>
+              <a:t>(</a:t>
+            </a:r>
+            <a:r>
+              <a:rPr sz="1049">
+                <a:solidFill>
+                  <a:srgbClr val="262B36"/>
+                </a:solidFill>
+                <a:latin typeface="Consolas"/>
+                <a:ea typeface="Consolas"/>
+                <a:cs typeface="Consolas"/>
+              </a:rPr>
+              <a:t>invocation</a:t>
+            </a:r>
+            <a:r>
+              <a:rPr sz="1049">
+                <a:solidFill>
+                  <a:srgbClr val="5C6574"/>
+                </a:solidFill>
+                <a:latin typeface="Consolas"/>
+                <a:ea typeface="Consolas"/>
+                <a:cs typeface="Consolas"/>
+              </a:rPr>
+              <a:t>.</a:t>
+            </a:r>
+            <a:r>
+              <a:rPr sz="1049" b="1">
+                <a:solidFill>
+                  <a:srgbClr val="7442C8"/>
+                </a:solidFill>
+                <a:latin typeface="Consolas"/>
+                <a:ea typeface="Consolas"/>
+                <a:cs typeface="Consolas"/>
+              </a:rPr>
+              <a:t>FilePath</a:t>
+            </a:r>
+            <a:r>
+              <a:rPr sz="1049">
+                <a:solidFill>
+                  <a:srgbClr val="5C6574"/>
+                </a:solidFill>
+                <a:latin typeface="Consolas"/>
+                <a:ea typeface="Consolas"/>
+                <a:cs typeface="Consolas"/>
+              </a:rPr>
+              <a:t>))</a:t>
             </a:r>
           </a:p>
           <a:p xmlns:a="http://schemas.openxmlformats.org/drawingml/2006/main">
@@ -26704,29 +27166,51 @@
                 <a:ea typeface="Consolas"/>
                 <a:cs typeface="Consolas"/>
               </a:rPr>
-              <a:t>    </a:t>
+              <a:t>      </a:t>
+            </a:r>
+            <a:r>
+              <a:rPr sz="1049">
+                <a:solidFill>
+                  <a:srgbClr val="5C6574"/>
+                </a:solidFill>
+                <a:latin typeface="Consolas"/>
+                <a:ea typeface="Consolas"/>
+                <a:cs typeface="Consolas"/>
+              </a:rPr>
+              <a:t>?</a:t>
+            </a:r>
+            <a:r>
+              <a:rPr sz="1049">
+                <a:solidFill>
+                  <a:srgbClr val="262B36"/>
+                </a:solidFill>
+                <a:latin typeface="Consolas"/>
+                <a:ea typeface="Consolas"/>
+                <a:cs typeface="Consolas"/>
+              </a:rPr>
+              <a:t> </a:t>
             </a:r>
             <a:r>
               <a:rPr sz="1049" b="1">
                 <a:solidFill>
-                  <a:srgbClr val="005CC5"/>
-                </a:solidFill>
-                <a:latin typeface="Consolas"/>
-                <a:ea typeface="Consolas"/>
-                <a:cs typeface="Consolas"/>
-              </a:rPr>
-              <a:t>return</a:t>
+                  <a:srgbClr val="7442C8"/>
+                </a:solidFill>
+                <a:latin typeface="Consolas"/>
+                <a:ea typeface="Consolas"/>
+                <a:cs typeface="Consolas"/>
+              </a:rPr>
+              <a:t>GuardrailDecision</a:t>
             </a:r>
             <a:r>
               <a:rPr sz="1049">
                 <a:solidFill>
-                  <a:srgbClr val="262B36"/>
-                </a:solidFill>
-                <a:latin typeface="Consolas"/>
-                <a:ea typeface="Consolas"/>
-                <a:cs typeface="Consolas"/>
-              </a:rPr>
-              <a:t> </a:t>
+                  <a:srgbClr val="5C6574"/>
+                </a:solidFill>
+                <a:latin typeface="Consolas"/>
+                <a:ea typeface="Consolas"/>
+                <a:cs typeface="Consolas"/>
+              </a:rPr>
+              <a:t>.</a:t>
             </a:r>
             <a:r>
               <a:rPr sz="1049" b="1">
@@ -26737,7 +27221,7 @@
                 <a:ea typeface="Consolas"/>
                 <a:cs typeface="Consolas"/>
               </a:rPr>
-              <a:t>ForbiddenNames</a:t>
+              <a:t>Block</a:t>
             </a:r>
             <a:r>
               <a:rPr sz="1049">
@@ -26748,73 +27232,29 @@
                 <a:ea typeface="Consolas"/>
                 <a:cs typeface="Consolas"/>
               </a:rPr>
-              <a:t>.</a:t>
-            </a:r>
-            <a:r>
-              <a:rPr sz="1049" b="1">
-                <a:solidFill>
-                  <a:srgbClr val="7442C8"/>
-                </a:solidFill>
-                <a:latin typeface="Consolas"/>
-                <a:ea typeface="Consolas"/>
-                <a:cs typeface="Consolas"/>
-              </a:rPr>
-              <a:t>Any</a:t>
+              <a:t>(</a:t>
             </a:r>
             <a:r>
               <a:rPr sz="1049">
                 <a:solidFill>
+                  <a:srgbClr val="A95921"/>
+                </a:solidFill>
+                <a:latin typeface="Consolas"/>
+                <a:ea typeface="Consolas"/>
+                <a:cs typeface="Consolas"/>
+              </a:rPr>
+              <a:t>"Blocked by project policy."</a:t>
+            </a:r>
+            <a:r>
+              <a:rPr sz="1049">
+                <a:solidFill>
                   <a:srgbClr val="5C6574"/>
                 </a:solidFill>
                 <a:latin typeface="Consolas"/>
                 <a:ea typeface="Consolas"/>
                 <a:cs typeface="Consolas"/>
               </a:rPr>
-              <a:t>(</a:t>
-            </a:r>
-            <a:r>
-              <a:rPr sz="1049">
-                <a:solidFill>
-                  <a:srgbClr val="262B36"/>
-                </a:solidFill>
-                <a:latin typeface="Consolas"/>
-                <a:ea typeface="Consolas"/>
-                <a:cs typeface="Consolas"/>
-              </a:rPr>
-              <a:t>name </a:t>
-            </a:r>
-            <a:r>
-              <a:rPr sz="1049">
-                <a:solidFill>
-                  <a:srgbClr val="5C6574"/>
-                </a:solidFill>
-                <a:latin typeface="Consolas"/>
-                <a:ea typeface="Consolas"/>
-                <a:cs typeface="Consolas"/>
-              </a:rPr>
-              <a:t>=&gt;</a:t>
-            </a:r>
-            <a:r>
-              <a:rPr sz="1049">
-                <a:solidFill>
-                  <a:srgbClr val="262B36"/>
-                </a:solidFill>
-                <a:latin typeface="Consolas"/>
-                <a:ea typeface="Consolas"/>
-                <a:cs typeface="Consolas"/>
-              </a:rPr>
-              <a:t> normalized</a:t>
-            </a:r>
-            <a:r>
-              <a:rPr sz="1049">
-                <a:solidFill>
-                  <a:srgbClr val="5C6574"/>
-                </a:solidFill>
-                <a:latin typeface="Consolas"/>
-                <a:ea typeface="Consolas"/>
-                <a:cs typeface="Consolas"/>
-              </a:rPr>
-              <a:t>?.</a:t>
+              <a:t>)</a:t>
             </a:r>
           </a:p>
           <a:p xmlns:a="http://schemas.openxmlformats.org/drawingml/2006/main">
@@ -26850,7 +27290,29 @@
                 <a:ea typeface="Consolas"/>
                 <a:cs typeface="Consolas"/>
               </a:rPr>
-              <a:t>        </a:t>
+              <a:t>      </a:t>
+            </a:r>
+            <a:r>
+              <a:rPr sz="1049">
+                <a:solidFill>
+                  <a:srgbClr val="5C6574"/>
+                </a:solidFill>
+                <a:latin typeface="Consolas"/>
+                <a:ea typeface="Consolas"/>
+                <a:cs typeface="Consolas"/>
+              </a:rPr>
+              <a:t>:</a:t>
+            </a:r>
+            <a:r>
+              <a:rPr sz="1049">
+                <a:solidFill>
+                  <a:srgbClr val="262B36"/>
+                </a:solidFill>
+                <a:latin typeface="Consolas"/>
+                <a:ea typeface="Consolas"/>
+                <a:cs typeface="Consolas"/>
+              </a:rPr>
+              <a:t> </a:t>
             </a:r>
             <a:r>
               <a:rPr sz="1049" b="1">
@@ -26861,7 +27323,7 @@
                 <a:ea typeface="Consolas"/>
                 <a:cs typeface="Consolas"/>
               </a:rPr>
-              <a:t>EndsWith</a:t>
+              <a:t>GuardrailDecision</a:t>
             </a:r>
             <a:r>
               <a:rPr sz="1049">
@@ -26872,84 +27334,29 @@
                 <a:ea typeface="Consolas"/>
                 <a:cs typeface="Consolas"/>
               </a:rPr>
-              <a:t>(</a:t>
+              <a:t>.</a:t>
+            </a:r>
+            <a:r>
+              <a:rPr sz="1049" b="1">
+                <a:solidFill>
+                  <a:srgbClr val="7442C8"/>
+                </a:solidFill>
+                <a:latin typeface="Consolas"/>
+                <a:ea typeface="Consolas"/>
+                <a:cs typeface="Consolas"/>
+              </a:rPr>
+              <a:t>Allow</a:t>
             </a:r>
             <a:r>
               <a:rPr sz="1049">
                 <a:solidFill>
-                  <a:srgbClr val="262B36"/>
-                </a:solidFill>
-                <a:latin typeface="Consolas"/>
-                <a:ea typeface="Consolas"/>
-                <a:cs typeface="Consolas"/>
-              </a:rPr>
-              <a:t>name</a:t>
-            </a:r>
-            <a:r>
-              <a:rPr sz="1049">
-                <a:solidFill>
                   <a:srgbClr val="5C6574"/>
                 </a:solidFill>
                 <a:latin typeface="Consolas"/>
                 <a:ea typeface="Consolas"/>
                 <a:cs typeface="Consolas"/>
               </a:rPr>
-              <a:t>)</a:t>
-            </a:r>
-            <a:r>
-              <a:rPr sz="1049">
-                <a:solidFill>
-                  <a:srgbClr val="262B36"/>
-                </a:solidFill>
-                <a:latin typeface="Consolas"/>
-                <a:ea typeface="Consolas"/>
-                <a:cs typeface="Consolas"/>
-              </a:rPr>
-              <a:t> </a:t>
-            </a:r>
-            <a:r>
-              <a:rPr sz="1049">
-                <a:solidFill>
-                  <a:srgbClr val="5C6574"/>
-                </a:solidFill>
-                <a:latin typeface="Consolas"/>
-                <a:ea typeface="Consolas"/>
-                <a:cs typeface="Consolas"/>
-              </a:rPr>
-              <a:t>==</a:t>
-            </a:r>
-            <a:r>
-              <a:rPr sz="1049">
-                <a:solidFill>
-                  <a:srgbClr val="262B36"/>
-                </a:solidFill>
-                <a:latin typeface="Consolas"/>
-                <a:ea typeface="Consolas"/>
-                <a:cs typeface="Consolas"/>
-              </a:rPr>
-              <a:t> </a:t>
-            </a:r>
-            <a:r>
-              <a:rPr sz="1049" b="1">
-                <a:solidFill>
-                  <a:srgbClr val="005CC5"/>
-                </a:solidFill>
-                <a:latin typeface="Consolas"/>
-                <a:ea typeface="Consolas"/>
-                <a:cs typeface="Consolas"/>
-              </a:rPr>
-              <a:t>true</a:t>
-            </a:r>
-            <a:r>
-              <a:rPr sz="1049">
-                <a:solidFill>
-                  <a:srgbClr val="5C6574"/>
-                </a:solidFill>
-                <a:latin typeface="Consolas"/>
-                <a:ea typeface="Consolas"/>
-                <a:cs typeface="Consolas"/>
-              </a:rPr>
-              <a:t>)</a:t>
+              <a:t>();</a:t>
             </a:r>
           </a:p>
           <a:p xmlns:a="http://schemas.openxmlformats.org/drawingml/2006/main">
@@ -26985,7 +27392,7 @@
                 <a:ea typeface="Consolas"/>
                 <a:cs typeface="Consolas"/>
               </a:rPr>
-              <a:t>      </a:t>
+              <a:t>  </a:t>
             </a:r>
             <a:r>
               <a:rPr sz="1049">
@@ -26996,84 +27403,7 @@
                 <a:ea typeface="Consolas"/>
                 <a:cs typeface="Consolas"/>
               </a:rPr>
-              <a:t>?</a:t>
-            </a:r>
-            <a:r>
-              <a:rPr sz="1049">
-                <a:solidFill>
-                  <a:srgbClr val="262B36"/>
-                </a:solidFill>
-                <a:latin typeface="Consolas"/>
-                <a:ea typeface="Consolas"/>
-                <a:cs typeface="Consolas"/>
-              </a:rPr>
-              <a:t> </a:t>
-            </a:r>
-            <a:r>
-              <a:rPr sz="1049" b="1">
-                <a:solidFill>
-                  <a:srgbClr val="7442C8"/>
-                </a:solidFill>
-                <a:latin typeface="Consolas"/>
-                <a:ea typeface="Consolas"/>
-                <a:cs typeface="Consolas"/>
-              </a:rPr>
-              <a:t>GuardrailDecision</a:t>
-            </a:r>
-            <a:r>
-              <a:rPr sz="1049">
-                <a:solidFill>
-                  <a:srgbClr val="5C6574"/>
-                </a:solidFill>
-                <a:latin typeface="Consolas"/>
-                <a:ea typeface="Consolas"/>
-                <a:cs typeface="Consolas"/>
-              </a:rPr>
-              <a:t>.</a:t>
-            </a:r>
-            <a:r>
-              <a:rPr sz="1049" b="1">
-                <a:solidFill>
-                  <a:srgbClr val="7442C8"/>
-                </a:solidFill>
-                <a:latin typeface="Consolas"/>
-                <a:ea typeface="Consolas"/>
-                <a:cs typeface="Consolas"/>
-              </a:rPr>
-              <a:t>Block</a:t>
-            </a:r>
-            <a:r>
-              <a:rPr sz="1049">
-                <a:solidFill>
-                  <a:srgbClr val="5C6574"/>
-                </a:solidFill>
-                <a:latin typeface="Consolas"/>
-                <a:ea typeface="Consolas"/>
-                <a:cs typeface="Consolas"/>
-              </a:rPr>
-              <a:t>(</a:t>
-            </a:r>
-            <a:r>
-              <a:rPr sz="1049">
-                <a:solidFill>
-                  <a:srgbClr val="A95921"/>
-                </a:solidFill>
-                <a:latin typeface="Consolas"/>
-                <a:ea typeface="Consolas"/>
-                <a:cs typeface="Consolas"/>
-              </a:rPr>
-              <a:t>"Sensitive file blocked."</a:t>
-            </a:r>
-            <a:r>
-              <a:rPr sz="1049">
-                <a:solidFill>
-                  <a:srgbClr val="5C6574"/>
-                </a:solidFill>
-                <a:latin typeface="Consolas"/>
-                <a:ea typeface="Consolas"/>
-                <a:cs typeface="Consolas"/>
-              </a:rPr>
-              <a:t>)</a:t>
+              <a:t>}</a:t>
             </a:r>
           </a:p>
           <a:p xmlns:a="http://schemas.openxmlformats.org/drawingml/2006/main">
@@ -27100,83 +27430,6 @@
               </a:rPr>
               <a:t>15  </a:t>
             </a:r>
-            <a:r>
-              <a:rPr sz="1049">
-                <a:solidFill>
-                  <a:srgbClr val="262B36"/>
-                </a:solidFill>
-                <a:latin typeface="Consolas"/>
-                <a:ea typeface="Consolas"/>
-                <a:cs typeface="Consolas"/>
-              </a:rPr>
-              <a:t>      </a:t>
-            </a:r>
-            <a:r>
-              <a:rPr sz="1049">
-                <a:solidFill>
-                  <a:srgbClr val="5C6574"/>
-                </a:solidFill>
-                <a:latin typeface="Consolas"/>
-                <a:ea typeface="Consolas"/>
-                <a:cs typeface="Consolas"/>
-              </a:rPr>
-              <a:t>:</a:t>
-            </a:r>
-            <a:r>
-              <a:rPr sz="1049">
-                <a:solidFill>
-                  <a:srgbClr val="262B36"/>
-                </a:solidFill>
-                <a:latin typeface="Consolas"/>
-                <a:ea typeface="Consolas"/>
-                <a:cs typeface="Consolas"/>
-              </a:rPr>
-              <a:t> </a:t>
-            </a:r>
-            <a:r>
-              <a:rPr sz="1049" b="1">
-                <a:solidFill>
-                  <a:srgbClr val="7442C8"/>
-                </a:solidFill>
-                <a:latin typeface="Consolas"/>
-                <a:ea typeface="Consolas"/>
-                <a:cs typeface="Consolas"/>
-              </a:rPr>
-              <a:t>GuardrailDecision</a:t>
-            </a:r>
-            <a:r>
-              <a:rPr sz="1049">
-                <a:solidFill>
-                  <a:srgbClr val="5C6574"/>
-                </a:solidFill>
-                <a:latin typeface="Consolas"/>
-                <a:ea typeface="Consolas"/>
-                <a:cs typeface="Consolas"/>
-              </a:rPr>
-              <a:t>.</a:t>
-            </a:r>
-            <a:r>
-              <a:rPr sz="1049" b="1">
-                <a:solidFill>
-                  <a:srgbClr val="7442C8"/>
-                </a:solidFill>
-                <a:latin typeface="Consolas"/>
-                <a:ea typeface="Consolas"/>
-                <a:cs typeface="Consolas"/>
-              </a:rPr>
-              <a:t>Allow</a:t>
-            </a:r>
-            <a:r>
-              <a:rPr sz="1049">
-                <a:solidFill>
-                  <a:srgbClr val="5C6574"/>
-                </a:solidFill>
-                <a:latin typeface="Consolas"/>
-                <a:ea typeface="Consolas"/>
-                <a:cs typeface="Consolas"/>
-              </a:rPr>
-              <a:t>();</a:t>
-            </a:r>
           </a:p>
           <a:p xmlns:a="http://schemas.openxmlformats.org/drawingml/2006/main">
             <a:pPr>
@@ -27216,13 +27469,13 @@
             <a:r>
               <a:rPr sz="1049">
                 <a:solidFill>
-                  <a:srgbClr val="5C6574"/>
-                </a:solidFill>
-                <a:latin typeface="Consolas"/>
-                <a:ea typeface="Consolas"/>
-                <a:cs typeface="Consolas"/>
-              </a:rPr>
-              <a:t>}</a:t>
+                  <a:srgbClr val="55845A"/>
+                </a:solidFill>
+                <a:latin typeface="Consolas"/>
+                <a:ea typeface="Consolas"/>
+                <a:cs typeface="Consolas"/>
+              </a:rPr>
+              <a:t>// IsSensitive: име из листе или почиње са ".env."</a:t>
             </a:r>
           </a:p>
           <a:p xmlns:a="http://schemas.openxmlformats.org/drawingml/2006/main">
@@ -29262,7 +29515,7 @@
                 <a:ea typeface="Aptos"/>
                 <a:cs typeface="Aptos"/>
               </a:rPr>
-              <a:t>PreToolUse повезује конкретан AI алат са guardrail политиком.</a:t>
+              <a:t>Kova пре сваког позива алата покреће guardrail пројекат као завршну проверу.</a:t>
             </a:r>
           </a:p>
         </p:txBody>

--- a/01 Elementi Razvoja Softvera/02 Prezentacije/PPTX/08_Guardrails_evaluacije_i_QA.pptx
+++ b/01 Elementi Razvoja Softvera/02 Prezentacije/PPTX/08_Guardrails_evaluacije_i_QA.pptx
@@ -6163,62 +6163,6 @@
       </p:sp>
       <p:sp>
         <p:nvSpPr>
-          <p:cNvPr id="9" name="TextBox 8">
-            <a:extLst xmlns:a="http://schemas.openxmlformats.org/drawingml/2006/main">
-              <a:ext uri="{FF2B5EF4-FFF2-40B4-BE49-F238E27FC236}">
-                <a16:creationId xmlns:a16="http://schemas.microsoft.com/office/drawing/2014/main" id="{05A20046-3BD8-422D-9B1B-25BA70C5D1AB}"/>
-              </a:ext>
-            </a:extLst>
-          </p:cNvPr>
-          <p:cNvSpPr>
-            <a:spLocks xmlns:a="http://schemas.openxmlformats.org/drawingml/2006/main" noGrp="1"/>
-          </p:cNvSpPr>
-          <p:nvPr/>
-        </p:nvSpPr>
-        <p:spPr>
-          <a:xfrm xmlns:a="http://schemas.openxmlformats.org/drawingml/2006/main">
-            <a:off x="1078992" y="2240280"/>
-            <a:ext cx="1097280" cy="209855"/>
-          </a:xfrm>
-          <a:prstGeom xmlns:a="http://schemas.openxmlformats.org/drawingml/2006/main" prst="rect">
-            <a:avLst/>
-          </a:prstGeom>
-          <a:noFill xmlns:a="http://schemas.openxmlformats.org/drawingml/2006/main"/>
-        </p:spPr>
-        <p:txBody>
-          <a:bodyPr xmlns:a="http://schemas.openxmlformats.org/drawingml/2006/main" wrap="square" lIns="0" tIns="0" rIns="0" bIns="0" anchor="t">
-            <a:spAutoFit/>
-          </a:bodyPr>
-          <a:lstStyle xmlns:a="http://schemas.openxmlformats.org/drawingml/2006/main"/>
-          <a:p xmlns:a="http://schemas.openxmlformats.org/drawingml/2006/main">
-            <a:pPr algn="l">
-              <a:lnSpc>
-                <a:spcPct val="108000"/>
-              </a:lnSpc>
-              <a:spcBef>
-                <a:spcPts val="0"/>
-              </a:spcBef>
-              <a:spcAft>
-                <a:spcPts val="0"/>
-              </a:spcAft>
-              <a:buNone/>
-            </a:pPr>
-            <a:r>
-              <a:rPr sz="1275" b="1">
-                <a:solidFill>
-                  <a:srgbClr val="183B5B"/>
-                </a:solidFill>
-                <a:latin typeface="Aptos"/>
-                <a:ea typeface="Aptos"/>
-                <a:cs typeface="Aptos"/>
-              </a:rPr>
-              <a:t>КОД</a:t>
-            </a:r>
-          </a:p>
-        </p:txBody>
-      </p:sp>
-      <p:sp>
-        <p:nvSpPr>
           <p:cNvPr id="10" name="Oval 9">
             <a:extLst xmlns:a="http://schemas.openxmlformats.org/drawingml/2006/main">
               <a:ext uri="{FF2B5EF4-FFF2-40B4-BE49-F238E27FC236}">
@@ -11236,7 +11180,7 @@
         <p:spPr>
           <a:xfrm xmlns:a="http://schemas.openxmlformats.org/drawingml/2006/main">
             <a:off x="914400" y="2578608"/>
-            <a:ext cx="5715000" cy="937792"/>
+            <a:ext cx="5715000" cy="829207"/>
           </a:xfrm>
           <a:prstGeom xmlns:a="http://schemas.openxmlformats.org/drawingml/2006/main" prst="roundRect">
             <a:avLst>
@@ -11504,7 +11448,7 @@
         <p:spPr>
           <a:xfrm xmlns:a="http://schemas.openxmlformats.org/drawingml/2006/main">
             <a:off x="1047750" y="3054858"/>
-            <a:ext cx="5448300" cy="2228850"/>
+            <a:ext cx="5448300" cy="2120265"/>
           </a:xfrm>
           <a:prstGeom xmlns:a="http://schemas.openxmlformats.org/drawingml/2006/main" prst="rect">
             <a:avLst/>
@@ -11593,54 +11537,7 @@
                 <a:ea typeface="Consolas"/>
                 <a:cs typeface="Consolas"/>
               </a:rPr>
-              <a:t>--</a:t>
-            </a:r>
-            <a:r>
-              <a:rPr sz="1125">
-                <a:solidFill>
-                  <a:srgbClr val="262B36"/>
-                </a:solidFill>
-                <a:latin typeface="Consolas"/>
-                <a:ea typeface="Consolas"/>
-                <a:cs typeface="Consolas"/>
-              </a:rPr>
-              <a:t>configuration</a:t>
-            </a:r>
-          </a:p>
-          <a:p xmlns:a="http://schemas.openxmlformats.org/drawingml/2006/main">
-            <a:pPr>
-              <a:lnSpc>
-                <a:spcPct val="105000"/>
-              </a:lnSpc>
-              <a:spcBef>
-                <a:spcPts val="0"/>
-              </a:spcBef>
-              <a:spcAft>
-                <a:spcPts val="0"/>
-              </a:spcAft>
-              <a:buNone/>
-            </a:pPr>
-            <a:r>
-              <a:rPr sz="1125">
-                <a:solidFill>
-                  <a:srgbClr val="8E97A6"/>
-                </a:solidFill>
-                <a:latin typeface="Consolas"/>
-                <a:ea typeface="Consolas"/>
-                <a:cs typeface="Consolas"/>
-              </a:rPr>
-              <a:t> 2  </a:t>
-            </a:r>
-            <a:r>
-              <a:rPr sz="1125">
-                <a:solidFill>
-                  <a:srgbClr val="262B36"/>
-                </a:solidFill>
-                <a:latin typeface="Consolas"/>
-                <a:ea typeface="Consolas"/>
-                <a:cs typeface="Consolas"/>
-              </a:rPr>
-              <a:t>    </a:t>
+              <a:t>-c </a:t>
             </a:r>
             <a:r>
               <a:rPr sz="1125" b="1">
@@ -22190,62 +22087,6 @@
       </p:sp>
       <p:sp>
         <p:nvSpPr>
-          <p:cNvPr id="9" name="TextBox 8">
-            <a:extLst xmlns:a="http://schemas.openxmlformats.org/drawingml/2006/main">
-              <a:ext uri="{FF2B5EF4-FFF2-40B4-BE49-F238E27FC236}">
-                <a16:creationId xmlns:a16="http://schemas.microsoft.com/office/drawing/2014/main" id="{76E0B6DC-F47B-48BD-9947-6725A277C857}"/>
-              </a:ext>
-            </a:extLst>
-          </p:cNvPr>
-          <p:cNvSpPr>
-            <a:spLocks xmlns:a="http://schemas.openxmlformats.org/drawingml/2006/main" noGrp="1"/>
-          </p:cNvSpPr>
-          <p:nvPr/>
-        </p:nvSpPr>
-        <p:spPr>
-          <a:xfrm xmlns:a="http://schemas.openxmlformats.org/drawingml/2006/main">
-            <a:off x="1078992" y="2240280"/>
-            <a:ext cx="1097280" cy="209855"/>
-          </a:xfrm>
-          <a:prstGeom xmlns:a="http://schemas.openxmlformats.org/drawingml/2006/main" prst="rect">
-            <a:avLst/>
-          </a:prstGeom>
-          <a:noFill xmlns:a="http://schemas.openxmlformats.org/drawingml/2006/main"/>
-        </p:spPr>
-        <p:txBody>
-          <a:bodyPr xmlns:a="http://schemas.openxmlformats.org/drawingml/2006/main" wrap="square" lIns="0" tIns="0" rIns="0" bIns="0" anchor="t">
-            <a:spAutoFit/>
-          </a:bodyPr>
-          <a:lstStyle xmlns:a="http://schemas.openxmlformats.org/drawingml/2006/main"/>
-          <a:p xmlns:a="http://schemas.openxmlformats.org/drawingml/2006/main">
-            <a:pPr algn="l">
-              <a:lnSpc>
-                <a:spcPct val="108000"/>
-              </a:lnSpc>
-              <a:spcBef>
-                <a:spcPts val="0"/>
-              </a:spcBef>
-              <a:spcAft>
-                <a:spcPts val="0"/>
-              </a:spcAft>
-              <a:buNone/>
-            </a:pPr>
-            <a:r>
-              <a:rPr sz="1275" b="1">
-                <a:solidFill>
-                  <a:srgbClr val="183B5B"/>
-                </a:solidFill>
-                <a:latin typeface="Aptos"/>
-                <a:ea typeface="Aptos"/>
-                <a:cs typeface="Aptos"/>
-              </a:rPr>
-              <a:t>КОД</a:t>
-            </a:r>
-          </a:p>
-        </p:txBody>
-      </p:sp>
-      <p:sp>
-        <p:nvSpPr>
           <p:cNvPr id="10" name="Oval 9">
             <a:extLst xmlns:a="http://schemas.openxmlformats.org/drawingml/2006/main">
               <a:ext uri="{FF2B5EF4-FFF2-40B4-BE49-F238E27FC236}">
@@ -25756,62 +25597,6 @@
               <a:buNone/>
             </a:pPr>
             <a:endParaRPr/>
-          </a:p>
-        </p:txBody>
-      </p:sp>
-      <p:sp>
-        <p:nvSpPr>
-          <p:cNvPr id="9" name="TextBox 8">
-            <a:extLst xmlns:a="http://schemas.openxmlformats.org/drawingml/2006/main">
-              <a:ext uri="{FF2B5EF4-FFF2-40B4-BE49-F238E27FC236}">
-                <a16:creationId xmlns:a16="http://schemas.microsoft.com/office/drawing/2014/main" id="{A82D15F9-7ACF-43C6-899E-752D37CEC709}"/>
-              </a:ext>
-            </a:extLst>
-          </p:cNvPr>
-          <p:cNvSpPr>
-            <a:spLocks xmlns:a="http://schemas.openxmlformats.org/drawingml/2006/main" noGrp="1"/>
-          </p:cNvSpPr>
-          <p:nvPr/>
-        </p:nvSpPr>
-        <p:spPr>
-          <a:xfrm xmlns:a="http://schemas.openxmlformats.org/drawingml/2006/main">
-            <a:off x="1078992" y="2240280"/>
-            <a:ext cx="1097280" cy="209855"/>
-          </a:xfrm>
-          <a:prstGeom xmlns:a="http://schemas.openxmlformats.org/drawingml/2006/main" prst="rect">
-            <a:avLst/>
-          </a:prstGeom>
-          <a:noFill xmlns:a="http://schemas.openxmlformats.org/drawingml/2006/main"/>
-        </p:spPr>
-        <p:txBody>
-          <a:bodyPr xmlns:a="http://schemas.openxmlformats.org/drawingml/2006/main" wrap="square" lIns="0" tIns="0" rIns="0" bIns="0" anchor="t">
-            <a:spAutoFit/>
-          </a:bodyPr>
-          <a:lstStyle xmlns:a="http://schemas.openxmlformats.org/drawingml/2006/main"/>
-          <a:p xmlns:a="http://schemas.openxmlformats.org/drawingml/2006/main">
-            <a:pPr algn="l">
-              <a:lnSpc>
-                <a:spcPct val="108000"/>
-              </a:lnSpc>
-              <a:spcBef>
-                <a:spcPts val="0"/>
-              </a:spcBef>
-              <a:spcAft>
-                <a:spcPts val="0"/>
-              </a:spcAft>
-              <a:buNone/>
-            </a:pPr>
-            <a:r>
-              <a:rPr sz="1275" b="1">
-                <a:solidFill>
-                  <a:srgbClr val="183B5B"/>
-                </a:solidFill>
-                <a:latin typeface="Aptos"/>
-                <a:ea typeface="Aptos"/>
-                <a:cs typeface="Aptos"/>
-              </a:rPr>
-              <a:t>КОД</a:t>
-            </a:r>
           </a:p>
         </p:txBody>
       </p:sp>
